--- a/notes/04-C_Basics.pptx
+++ b/notes/04-C_Basics.pptx
@@ -5,10 +5,10 @@
     <p:sldMasterId id="2147483684" r:id="rId4"/>
   </p:sldMasterIdLst>
   <p:notesMasterIdLst>
-    <p:notesMasterId r:id="rId53"/>
+    <p:notesMasterId r:id="rId54"/>
   </p:notesMasterIdLst>
   <p:handoutMasterIdLst>
-    <p:handoutMasterId r:id="rId54"/>
+    <p:handoutMasterId r:id="rId55"/>
   </p:handoutMasterIdLst>
   <p:sldIdLst>
     <p:sldId id="256" r:id="rId5"/>
@@ -28,37 +28,38 @@
     <p:sldId id="1078" r:id="rId19"/>
     <p:sldId id="1074" r:id="rId20"/>
     <p:sldId id="1075" r:id="rId21"/>
-    <p:sldId id="1094" r:id="rId22"/>
-    <p:sldId id="1076" r:id="rId23"/>
-    <p:sldId id="1077" r:id="rId24"/>
-    <p:sldId id="1079" r:id="rId25"/>
-    <p:sldId id="1095" r:id="rId26"/>
-    <p:sldId id="1080" r:id="rId27"/>
-    <p:sldId id="1081" r:id="rId28"/>
-    <p:sldId id="1083" r:id="rId29"/>
-    <p:sldId id="1085" r:id="rId30"/>
-    <p:sldId id="1087" r:id="rId31"/>
-    <p:sldId id="1090" r:id="rId32"/>
-    <p:sldId id="1091" r:id="rId33"/>
-    <p:sldId id="1088" r:id="rId34"/>
-    <p:sldId id="1092" r:id="rId35"/>
-    <p:sldId id="984" r:id="rId36"/>
-    <p:sldId id="939" r:id="rId37"/>
-    <p:sldId id="982" r:id="rId38"/>
-    <p:sldId id="983" r:id="rId39"/>
-    <p:sldId id="1093" r:id="rId40"/>
-    <p:sldId id="1089" r:id="rId41"/>
-    <p:sldId id="977" r:id="rId42"/>
-    <p:sldId id="978" r:id="rId43"/>
-    <p:sldId id="979" r:id="rId44"/>
-    <p:sldId id="951" r:id="rId45"/>
-    <p:sldId id="973" r:id="rId46"/>
-    <p:sldId id="952" r:id="rId47"/>
-    <p:sldId id="953" r:id="rId48"/>
-    <p:sldId id="956" r:id="rId49"/>
-    <p:sldId id="974" r:id="rId50"/>
-    <p:sldId id="958" r:id="rId51"/>
-    <p:sldId id="959" r:id="rId52"/>
+    <p:sldId id="1096" r:id="rId22"/>
+    <p:sldId id="1094" r:id="rId23"/>
+    <p:sldId id="1076" r:id="rId24"/>
+    <p:sldId id="1077" r:id="rId25"/>
+    <p:sldId id="1079" r:id="rId26"/>
+    <p:sldId id="1095" r:id="rId27"/>
+    <p:sldId id="1080" r:id="rId28"/>
+    <p:sldId id="1081" r:id="rId29"/>
+    <p:sldId id="1083" r:id="rId30"/>
+    <p:sldId id="1085" r:id="rId31"/>
+    <p:sldId id="1087" r:id="rId32"/>
+    <p:sldId id="1090" r:id="rId33"/>
+    <p:sldId id="1091" r:id="rId34"/>
+    <p:sldId id="1088" r:id="rId35"/>
+    <p:sldId id="1092" r:id="rId36"/>
+    <p:sldId id="984" r:id="rId37"/>
+    <p:sldId id="939" r:id="rId38"/>
+    <p:sldId id="982" r:id="rId39"/>
+    <p:sldId id="983" r:id="rId40"/>
+    <p:sldId id="1093" r:id="rId41"/>
+    <p:sldId id="1089" r:id="rId42"/>
+    <p:sldId id="977" r:id="rId43"/>
+    <p:sldId id="978" r:id="rId44"/>
+    <p:sldId id="979" r:id="rId45"/>
+    <p:sldId id="951" r:id="rId46"/>
+    <p:sldId id="973" r:id="rId47"/>
+    <p:sldId id="952" r:id="rId48"/>
+    <p:sldId id="953" r:id="rId49"/>
+    <p:sldId id="956" r:id="rId50"/>
+    <p:sldId id="974" r:id="rId51"/>
+    <p:sldId id="958" r:id="rId52"/>
+    <p:sldId id="959" r:id="rId53"/>
   </p:sldIdLst>
   <p:sldSz cx="9144000" cy="6858000" type="screen4x3"/>
   <p:notesSz cx="6858000" cy="9144000"/>
@@ -258,7 +259,7 @@
           <a:p>
             <a:fld id="{C9615FF3-9FA2-1C4A-AAEA-4750F890D655}" type="datetimeFigureOut">
               <a:rPr lang="en-US" smtClean="0"/>
-              <a:t>2/2/26</a:t>
+              <a:t>9/16/26</a:t>
             </a:fld>
             <a:endParaRPr lang="en-US"/>
           </a:p>
@@ -424,7 +425,7 @@
           <a:p>
             <a:fld id="{52180D89-5C43-EF4A-AA48-38E879565468}" type="datetimeFigureOut">
               <a:rPr lang="en-US" smtClean="0"/>
-              <a:t>2/2/26</a:t>
+              <a:t>9/16/26</a:t>
             </a:fld>
             <a:endParaRPr lang="en-US"/>
           </a:p>
@@ -831,7 +832,7 @@
             <a:spLocks noGrp="1"/>
           </p:cNvSpPr>
           <p:nvPr>
-            <p:ph type="sldNum" sz="quarter" idx="10"/>
+            <p:ph type="sldNum" sz="quarter" idx="5"/>
           </p:nvPr>
         </p:nvSpPr>
         <p:spPr/>
@@ -850,7 +851,7 @@
     </p:spTree>
     <p:extLst>
       <p:ext uri="{BB962C8B-B14F-4D97-AF65-F5344CB8AC3E}">
-        <p14:creationId xmlns:p14="http://schemas.microsoft.com/office/powerpoint/2010/main" val="834490132"/>
+        <p14:creationId xmlns:p14="http://schemas.microsoft.com/office/powerpoint/2010/main" val="4147811180"/>
       </p:ext>
     </p:extLst>
   </p:cSld>
@@ -925,7 +926,7 @@
           <a:p>
             <a:fld id="{8556610F-FCBD-844B-B814-9F48A27EB77F}" type="slidenum">
               <a:rPr lang="en-US" smtClean="0"/>
-              <a:t>34</a:t>
+              <a:t>31</a:t>
             </a:fld>
             <a:endParaRPr lang="en-US"/>
           </a:p>
@@ -934,7 +935,7 @@
     </p:spTree>
     <p:extLst>
       <p:ext uri="{BB962C8B-B14F-4D97-AF65-F5344CB8AC3E}">
-        <p14:creationId xmlns:p14="http://schemas.microsoft.com/office/powerpoint/2010/main" val="2705639235"/>
+        <p14:creationId xmlns:p14="http://schemas.microsoft.com/office/powerpoint/2010/main" val="834490132"/>
       </p:ext>
     </p:extLst>
   </p:cSld>
@@ -1047,7 +1048,7 @@
       </p:grpSpPr>
       <p:sp>
         <p:nvSpPr>
-          <p:cNvPr id="2" name="幻灯片图像占位符 1"/>
+          <p:cNvPr id="2" name="Slide Image Placeholder 1"/>
           <p:cNvSpPr>
             <a:spLocks noGrp="1" noRot="1" noChangeAspect="1"/>
           </p:cNvSpPr>
@@ -1059,7 +1060,7 @@
       </p:sp>
       <p:sp>
         <p:nvSpPr>
-          <p:cNvPr id="3" name="备注占位符 2"/>
+          <p:cNvPr id="3" name="Notes Placeholder 2"/>
           <p:cNvSpPr>
             <a:spLocks noGrp="1"/>
           </p:cNvSpPr>
@@ -1072,37 +1073,13 @@
           <a:bodyPr/>
           <a:lstStyle/>
           <a:p>
-            <a:pPr marL="0" marR="0" indent="0" algn="l" defTabSz="457200" rtl="0" eaLnBrk="1" fontAlgn="auto" latinLnBrk="0" hangingPunct="1">
-              <a:lnSpc>
-                <a:spcPct val="100000"/>
-              </a:lnSpc>
-              <a:spcBef>
-                <a:spcPts val="0"/>
-              </a:spcBef>
-              <a:spcAft>
-                <a:spcPts val="0"/>
-              </a:spcAft>
-              <a:buClrTx/>
-              <a:buSzTx/>
-              <a:buFontTx/>
-              <a:buNone/>
-              <a:tabLst/>
-              <a:defRPr/>
-            </a:pPr>
-            <a:r>
-              <a:rPr kumimoji="1" lang="en-US" altLang="zh-CN" dirty="0"/>
-              <a:t>-2147483648</a:t>
-            </a:r>
-            <a:endParaRPr kumimoji="1" lang="zh-CN" altLang="en-US" dirty="0"/>
-          </a:p>
-          <a:p>
-            <a:endParaRPr kumimoji="1" lang="zh-CN" altLang="en-US" dirty="0"/>
+            <a:endParaRPr lang="en-US" dirty="0"/>
           </a:p>
         </p:txBody>
       </p:sp>
       <p:sp>
         <p:nvSpPr>
-          <p:cNvPr id="4" name="幻灯片编号占位符 3"/>
+          <p:cNvPr id="4" name="Slide Number Placeholder 3"/>
           <p:cNvSpPr>
             <a:spLocks noGrp="1"/>
           </p:cNvSpPr>
@@ -1117,7 +1094,7 @@
           <a:p>
             <a:fld id="{8556610F-FCBD-844B-B814-9F48A27EB77F}" type="slidenum">
               <a:rPr lang="en-US" smtClean="0"/>
-              <a:t>44</a:t>
+              <a:t>36</a:t>
             </a:fld>
             <a:endParaRPr lang="en-US"/>
           </a:p>
@@ -1126,7 +1103,7 @@
     </p:spTree>
     <p:extLst>
       <p:ext uri="{BB962C8B-B14F-4D97-AF65-F5344CB8AC3E}">
-        <p14:creationId xmlns:p14="http://schemas.microsoft.com/office/powerpoint/2010/main" val="3448787687"/>
+        <p14:creationId xmlns:p14="http://schemas.microsoft.com/office/powerpoint/2010/main" val="2705639235"/>
       </p:ext>
     </p:extLst>
   </p:cSld>
@@ -1180,10 +1157,30 @@
           <a:bodyPr/>
           <a:lstStyle/>
           <a:p>
-            <a:r>
-              <a:rPr kumimoji="1" lang="en-US" altLang="zh-CN"/>
+            <a:pPr marL="0" marR="0" indent="0" algn="l" defTabSz="457200" rtl="0" eaLnBrk="1" fontAlgn="auto" latinLnBrk="0" hangingPunct="1">
+              <a:lnSpc>
+                <a:spcPct val="100000"/>
+              </a:lnSpc>
+              <a:spcBef>
+                <a:spcPts val="0"/>
+              </a:spcBef>
+              <a:spcAft>
+                <a:spcPts val="0"/>
+              </a:spcAft>
+              <a:buClrTx/>
+              <a:buSzTx/>
+              <a:buFontTx/>
+              <a:buNone/>
+              <a:tabLst/>
+              <a:defRPr/>
+            </a:pPr>
+            <a:r>
+              <a:rPr kumimoji="1" lang="en-US" altLang="zh-CN" dirty="0"/>
               <a:t>-2147483648</a:t>
             </a:r>
+            <a:endParaRPr kumimoji="1" lang="zh-CN" altLang="en-US" dirty="0"/>
+          </a:p>
+          <a:p>
             <a:endParaRPr kumimoji="1" lang="zh-CN" altLang="en-US" dirty="0"/>
           </a:p>
         </p:txBody>
@@ -1214,7 +1211,7 @@
     </p:spTree>
     <p:extLst>
       <p:ext uri="{BB962C8B-B14F-4D97-AF65-F5344CB8AC3E}">
-        <p14:creationId xmlns:p14="http://schemas.microsoft.com/office/powerpoint/2010/main" val="2714740142"/>
+        <p14:creationId xmlns:p14="http://schemas.microsoft.com/office/powerpoint/2010/main" val="3448787687"/>
       </p:ext>
     </p:extLst>
   </p:cSld>
@@ -1356,6 +1353,10 @@
           <a:bodyPr/>
           <a:lstStyle/>
           <a:p>
+            <a:r>
+              <a:rPr kumimoji="1" lang="en-US" altLang="zh-CN"/>
+              <a:t>-2147483648</a:t>
+            </a:r>
             <a:endParaRPr kumimoji="1" lang="zh-CN" altLang="en-US" dirty="0"/>
           </a:p>
         </p:txBody>
@@ -1480,6 +1481,90 @@
 </p:notes>
 </file>
 
+<file path=ppt/notesSlides/notesSlide18.xml><?xml version="1.0" encoding="utf-8"?>
+<p:notes xmlns:a="http://schemas.openxmlformats.org/drawingml/2006/main" xmlns:r="http://schemas.openxmlformats.org/officeDocument/2006/relationships" xmlns:p="http://schemas.openxmlformats.org/presentationml/2006/main">
+  <p:cSld>
+    <p:spTree>
+      <p:nvGrpSpPr>
+        <p:cNvPr id="1" name=""/>
+        <p:cNvGrpSpPr/>
+        <p:nvPr/>
+      </p:nvGrpSpPr>
+      <p:grpSpPr>
+        <a:xfrm>
+          <a:off x="0" y="0"/>
+          <a:ext cx="0" cy="0"/>
+          <a:chOff x="0" y="0"/>
+          <a:chExt cx="0" cy="0"/>
+        </a:xfrm>
+      </p:grpSpPr>
+      <p:sp>
+        <p:nvSpPr>
+          <p:cNvPr id="2" name="幻灯片图像占位符 1"/>
+          <p:cNvSpPr>
+            <a:spLocks noGrp="1" noRot="1" noChangeAspect="1"/>
+          </p:cNvSpPr>
+          <p:nvPr>
+            <p:ph type="sldImg"/>
+          </p:nvPr>
+        </p:nvSpPr>
+        <p:spPr/>
+      </p:sp>
+      <p:sp>
+        <p:nvSpPr>
+          <p:cNvPr id="3" name="备注占位符 2"/>
+          <p:cNvSpPr>
+            <a:spLocks noGrp="1"/>
+          </p:cNvSpPr>
+          <p:nvPr>
+            <p:ph type="body" idx="1"/>
+          </p:nvPr>
+        </p:nvSpPr>
+        <p:spPr/>
+        <p:txBody>
+          <a:bodyPr/>
+          <a:lstStyle/>
+          <a:p>
+            <a:endParaRPr kumimoji="1" lang="zh-CN" altLang="en-US" dirty="0"/>
+          </a:p>
+        </p:txBody>
+      </p:sp>
+      <p:sp>
+        <p:nvSpPr>
+          <p:cNvPr id="4" name="幻灯片编号占位符 3"/>
+          <p:cNvSpPr>
+            <a:spLocks noGrp="1"/>
+          </p:cNvSpPr>
+          <p:nvPr>
+            <p:ph type="sldNum" sz="quarter" idx="10"/>
+          </p:nvPr>
+        </p:nvSpPr>
+        <p:spPr/>
+        <p:txBody>
+          <a:bodyPr/>
+          <a:lstStyle/>
+          <a:p>
+            <a:fld id="{8556610F-FCBD-844B-B814-9F48A27EB77F}" type="slidenum">
+              <a:rPr lang="en-US" smtClean="0"/>
+              <a:t>49</a:t>
+            </a:fld>
+            <a:endParaRPr lang="en-US"/>
+          </a:p>
+        </p:txBody>
+      </p:sp>
+    </p:spTree>
+    <p:extLst>
+      <p:ext uri="{BB962C8B-B14F-4D97-AF65-F5344CB8AC3E}">
+        <p14:creationId xmlns:p14="http://schemas.microsoft.com/office/powerpoint/2010/main" val="2714740142"/>
+      </p:ext>
+    </p:extLst>
+  </p:cSld>
+  <p:clrMapOvr>
+    <a:masterClrMapping/>
+  </p:clrMapOvr>
+</p:notes>
+</file>
+
 <file path=ppt/notesSlides/notesSlide2.xml><?xml version="1.0" encoding="utf-8"?>
 <p:notes xmlns:a="http://schemas.openxmlformats.org/drawingml/2006/main" xmlns:r="http://schemas.openxmlformats.org/officeDocument/2006/relationships" xmlns:p="http://schemas.openxmlformats.org/presentationml/2006/main">
   <p:cSld>
@@ -1592,7 +1677,7 @@
       </p:grpSpPr>
       <p:sp>
         <p:nvSpPr>
-          <p:cNvPr id="2" name="幻灯片图像占位符 1"/>
+          <p:cNvPr id="2" name="Slide Image Placeholder 1"/>
           <p:cNvSpPr>
             <a:spLocks noGrp="1" noRot="1" noChangeAspect="1"/>
           </p:cNvSpPr>
@@ -1604,7 +1689,7 @@
       </p:sp>
       <p:sp>
         <p:nvSpPr>
-          <p:cNvPr id="3" name="备注占位符 2"/>
+          <p:cNvPr id="3" name="Notes Placeholder 2"/>
           <p:cNvSpPr>
             <a:spLocks noGrp="1"/>
           </p:cNvSpPr>
@@ -1617,40 +1702,18 @@
           <a:bodyPr/>
           <a:lstStyle/>
           <a:p>
-            <a:r>
-              <a:rPr lang="en-US" altLang="zh-CN" sz="1200" kern="1200" dirty="0" err="1">
-                <a:solidFill>
-                  <a:schemeClr val="tx1"/>
-                </a:solidFill>
-                <a:latin typeface="+mn-lt"/>
-                <a:ea typeface="+mn-ea"/>
-                <a:cs typeface="+mn-cs"/>
-              </a:rPr>
-              <a:t>xxd</a:t>
-            </a:r>
-            <a:r>
-              <a:rPr lang="en-US" altLang="zh-CN" sz="1200" kern="1200" dirty="0">
-                <a:solidFill>
-                  <a:schemeClr val="tx1"/>
-                </a:solidFill>
-                <a:latin typeface="+mn-lt"/>
-                <a:ea typeface="+mn-ea"/>
-                <a:cs typeface="+mn-cs"/>
-              </a:rPr>
-              <a:t> -b hello</a:t>
-            </a:r>
-            <a:endParaRPr kumimoji="1" lang="zh-CN" altLang="en-US" dirty="0"/>
+            <a:endParaRPr lang="en-US" dirty="0"/>
           </a:p>
         </p:txBody>
       </p:sp>
       <p:sp>
         <p:nvSpPr>
-          <p:cNvPr id="4" name="幻灯片编号占位符 3"/>
+          <p:cNvPr id="4" name="Slide Number Placeholder 3"/>
           <p:cNvSpPr>
             <a:spLocks noGrp="1"/>
           </p:cNvSpPr>
           <p:nvPr>
-            <p:ph type="sldNum" sz="quarter" idx="10"/>
+            <p:ph type="sldNum" sz="quarter" idx="5"/>
           </p:nvPr>
         </p:nvSpPr>
         <p:spPr/>
@@ -1660,7 +1723,7 @@
           <a:p>
             <a:fld id="{8556610F-FCBD-844B-B814-9F48A27EB77F}" type="slidenum">
               <a:rPr lang="en-US" smtClean="0"/>
-              <a:t>9</a:t>
+              <a:t>8</a:t>
             </a:fld>
             <a:endParaRPr lang="en-US"/>
           </a:p>
@@ -1669,7 +1732,7 @@
     </p:spTree>
     <p:extLst>
       <p:ext uri="{BB962C8B-B14F-4D97-AF65-F5344CB8AC3E}">
-        <p14:creationId xmlns:p14="http://schemas.microsoft.com/office/powerpoint/2010/main" val="3508338963"/>
+        <p14:creationId xmlns:p14="http://schemas.microsoft.com/office/powerpoint/2010/main" val="4215845189"/>
       </p:ext>
     </p:extLst>
   </p:cSld>
@@ -1698,7 +1761,7 @@
       </p:grpSpPr>
       <p:sp>
         <p:nvSpPr>
-          <p:cNvPr id="2" name="Slide Image Placeholder 1"/>
+          <p:cNvPr id="2" name="幻灯片图像占位符 1"/>
           <p:cNvSpPr>
             <a:spLocks noGrp="1" noRot="1" noChangeAspect="1"/>
           </p:cNvSpPr>
@@ -1710,7 +1773,7 @@
       </p:sp>
       <p:sp>
         <p:nvSpPr>
-          <p:cNvPr id="3" name="Notes Placeholder 2"/>
+          <p:cNvPr id="3" name="备注占位符 2"/>
           <p:cNvSpPr>
             <a:spLocks noGrp="1"/>
           </p:cNvSpPr>
@@ -1723,13 +1786,35 @@
           <a:bodyPr/>
           <a:lstStyle/>
           <a:p>
-            <a:endParaRPr lang="en-US" dirty="0"/>
+            <a:r>
+              <a:rPr lang="en-US" altLang="zh-CN" sz="1200" kern="1200" dirty="0" err="1">
+                <a:solidFill>
+                  <a:schemeClr val="tx1"/>
+                </a:solidFill>
+                <a:latin typeface="+mn-lt"/>
+                <a:ea typeface="+mn-ea"/>
+                <a:cs typeface="+mn-cs"/>
+              </a:rPr>
+              <a:t>xxd</a:t>
+            </a:r>
+            <a:r>
+              <a:rPr lang="en-US" altLang="zh-CN" sz="1200" kern="1200" dirty="0">
+                <a:solidFill>
+                  <a:schemeClr val="tx1"/>
+                </a:solidFill>
+                <a:latin typeface="+mn-lt"/>
+                <a:ea typeface="+mn-ea"/>
+                <a:cs typeface="+mn-cs"/>
+              </a:rPr>
+              <a:t> -b hello</a:t>
+            </a:r>
+            <a:endParaRPr kumimoji="1" lang="zh-CN" altLang="en-US" dirty="0"/>
           </a:p>
         </p:txBody>
       </p:sp>
       <p:sp>
         <p:nvSpPr>
-          <p:cNvPr id="4" name="Slide Number Placeholder 3"/>
+          <p:cNvPr id="4" name="幻灯片编号占位符 3"/>
           <p:cNvSpPr>
             <a:spLocks noGrp="1"/>
           </p:cNvSpPr>
@@ -1744,7 +1829,7 @@
           <a:p>
             <a:fld id="{8556610F-FCBD-844B-B814-9F48A27EB77F}" type="slidenum">
               <a:rPr lang="en-US" smtClean="0"/>
-              <a:t>12</a:t>
+              <a:t>9</a:t>
             </a:fld>
             <a:endParaRPr lang="en-US"/>
           </a:p>
@@ -1753,7 +1838,7 @@
     </p:spTree>
     <p:extLst>
       <p:ext uri="{BB962C8B-B14F-4D97-AF65-F5344CB8AC3E}">
-        <p14:creationId xmlns:p14="http://schemas.microsoft.com/office/powerpoint/2010/main" val="1569470473"/>
+        <p14:creationId xmlns:p14="http://schemas.microsoft.com/office/powerpoint/2010/main" val="3508338963"/>
       </p:ext>
     </p:extLst>
   </p:cSld>
@@ -1818,7 +1903,7 @@
             <a:spLocks noGrp="1"/>
           </p:cNvSpPr>
           <p:nvPr>
-            <p:ph type="sldNum" sz="quarter" idx="5"/>
+            <p:ph type="sldNum" sz="quarter" idx="10"/>
           </p:nvPr>
         </p:nvSpPr>
         <p:spPr/>
@@ -1828,7 +1913,7 @@
           <a:p>
             <a:fld id="{8556610F-FCBD-844B-B814-9F48A27EB77F}" type="slidenum">
               <a:rPr lang="en-US" smtClean="0"/>
-              <a:t>21</a:t>
+              <a:t>12</a:t>
             </a:fld>
             <a:endParaRPr lang="en-US"/>
           </a:p>
@@ -1837,7 +1922,7 @@
     </p:spTree>
     <p:extLst>
       <p:ext uri="{BB962C8B-B14F-4D97-AF65-F5344CB8AC3E}">
-        <p14:creationId xmlns:p14="http://schemas.microsoft.com/office/powerpoint/2010/main" val="2745356748"/>
+        <p14:creationId xmlns:p14="http://schemas.microsoft.com/office/powerpoint/2010/main" val="1569470473"/>
       </p:ext>
     </p:extLst>
   </p:cSld>
@@ -1912,7 +1997,7 @@
           <a:p>
             <a:fld id="{8556610F-FCBD-844B-B814-9F48A27EB77F}" type="slidenum">
               <a:rPr lang="en-US" smtClean="0"/>
-              <a:t>25</a:t>
+              <a:t>22</a:t>
             </a:fld>
             <a:endParaRPr lang="en-US"/>
           </a:p>
@@ -1921,7 +2006,7 @@
     </p:spTree>
     <p:extLst>
       <p:ext uri="{BB962C8B-B14F-4D97-AF65-F5344CB8AC3E}">
-        <p14:creationId xmlns:p14="http://schemas.microsoft.com/office/powerpoint/2010/main" val="1804958446"/>
+        <p14:creationId xmlns:p14="http://schemas.microsoft.com/office/powerpoint/2010/main" val="2745356748"/>
       </p:ext>
     </p:extLst>
   </p:cSld>
@@ -1986,7 +2071,7 @@
             <a:spLocks noGrp="1"/>
           </p:cNvSpPr>
           <p:nvPr>
-            <p:ph type="sldNum" sz="quarter" idx="10"/>
+            <p:ph type="sldNum" sz="quarter" idx="5"/>
           </p:nvPr>
         </p:nvSpPr>
         <p:spPr/>
@@ -1996,7 +2081,7 @@
           <a:p>
             <a:fld id="{8556610F-FCBD-844B-B814-9F48A27EB77F}" type="slidenum">
               <a:rPr lang="en-US" smtClean="0"/>
-              <a:t>27</a:t>
+              <a:t>26</a:t>
             </a:fld>
             <a:endParaRPr lang="en-US"/>
           </a:p>
@@ -2005,7 +2090,7 @@
     </p:spTree>
     <p:extLst>
       <p:ext uri="{BB962C8B-B14F-4D97-AF65-F5344CB8AC3E}">
-        <p14:creationId xmlns:p14="http://schemas.microsoft.com/office/powerpoint/2010/main" val="834490132"/>
+        <p14:creationId xmlns:p14="http://schemas.microsoft.com/office/powerpoint/2010/main" val="1804958446"/>
       </p:ext>
     </p:extLst>
   </p:cSld>
@@ -2059,10 +2144,7 @@
           <a:bodyPr/>
           <a:lstStyle/>
           <a:p>
-            <a:r>
-              <a:rPr lang="en-US" dirty="0"/>
-              <a:t>https://forms.gle/HbKYeKWCCgREpoKm6</a:t>
-            </a:r>
+            <a:endParaRPr lang="en-US" dirty="0"/>
           </a:p>
         </p:txBody>
       </p:sp>
@@ -2073,7 +2155,7 @@
             <a:spLocks noGrp="1"/>
           </p:cNvSpPr>
           <p:nvPr>
-            <p:ph type="sldNum" sz="quarter" idx="5"/>
+            <p:ph type="sldNum" sz="quarter" idx="10"/>
           </p:nvPr>
         </p:nvSpPr>
         <p:spPr/>
@@ -2092,7 +2174,7 @@
     </p:spTree>
     <p:extLst>
       <p:ext uri="{BB962C8B-B14F-4D97-AF65-F5344CB8AC3E}">
-        <p14:creationId xmlns:p14="http://schemas.microsoft.com/office/powerpoint/2010/main" val="2739136462"/>
+        <p14:creationId xmlns:p14="http://schemas.microsoft.com/office/powerpoint/2010/main" val="834490132"/>
       </p:ext>
     </p:extLst>
   </p:cSld>
@@ -2146,7 +2228,10 @@
           <a:bodyPr/>
           <a:lstStyle/>
           <a:p>
-            <a:endParaRPr lang="en-US" dirty="0"/>
+            <a:r>
+              <a:rPr lang="en-US" dirty="0"/>
+              <a:t>https://forms.gle/HbKYeKWCCgREpoKm6</a:t>
+            </a:r>
           </a:p>
         </p:txBody>
       </p:sp>
@@ -2176,7 +2261,7 @@
     </p:spTree>
     <p:extLst>
       <p:ext uri="{BB962C8B-B14F-4D97-AF65-F5344CB8AC3E}">
-        <p14:creationId xmlns:p14="http://schemas.microsoft.com/office/powerpoint/2010/main" val="4147811180"/>
+        <p14:creationId xmlns:p14="http://schemas.microsoft.com/office/powerpoint/2010/main" val="2739136462"/>
       </p:ext>
     </p:extLst>
   </p:cSld>
@@ -2371,7 +2456,7 @@
           <a:p>
             <a:fld id="{212D147F-079F-4846-994D-0DB4A1A045D4}" type="datetime1">
               <a:rPr lang="zh-CN" altLang="en-US" smtClean="0"/>
-              <a:t>2026/2/2</a:t>
+              <a:t>2026/9/16</a:t>
             </a:fld>
             <a:endParaRPr lang="en-US"/>
           </a:p>
@@ -2535,7 +2620,7 @@
           <a:p>
             <a:fld id="{17491736-879B-FE48-95EC-EDE8A01D99DB}" type="datetime1">
               <a:rPr lang="zh-CN" altLang="en-US" smtClean="0"/>
-              <a:t>2026/2/2</a:t>
+              <a:t>2026/9/16</a:t>
             </a:fld>
             <a:endParaRPr lang="en-US"/>
           </a:p>
@@ -2709,7 +2794,7 @@
           <a:p>
             <a:fld id="{B977160F-44E5-DA43-A440-B77513F80BF6}" type="datetime1">
               <a:rPr lang="zh-CN" altLang="en-US" smtClean="0"/>
-              <a:t>2026/2/2</a:t>
+              <a:t>2026/9/16</a:t>
             </a:fld>
             <a:endParaRPr lang="en-US"/>
           </a:p>
@@ -2879,7 +2964,7 @@
           <a:p>
             <a:fld id="{AE880671-2720-6742-BF3B-130F38BFD6C2}" type="datetime1">
               <a:rPr lang="zh-CN" altLang="en-US" smtClean="0"/>
-              <a:t>2026/2/2</a:t>
+              <a:t>2026/9/16</a:t>
             </a:fld>
             <a:endParaRPr lang="en-US"/>
           </a:p>
@@ -3120,7 +3205,7 @@
           <a:p>
             <a:fld id="{0C2FF912-C460-F747-A5A7-E580342BDBD8}" type="datetime1">
               <a:rPr lang="zh-CN" altLang="en-US" smtClean="0"/>
-              <a:t>2026/2/2</a:t>
+              <a:t>2026/9/16</a:t>
             </a:fld>
             <a:endParaRPr lang="en-US"/>
           </a:p>
@@ -3401,7 +3486,7 @@
           <a:p>
             <a:fld id="{1EEB1225-B413-9941-B6FE-722B9F1A3838}" type="datetime1">
               <a:rPr lang="zh-CN" altLang="en-US" smtClean="0"/>
-              <a:t>2026/2/2</a:t>
+              <a:t>2026/9/16</a:t>
             </a:fld>
             <a:endParaRPr lang="en-US"/>
           </a:p>
@@ -3816,7 +3901,7 @@
           <a:p>
             <a:fld id="{3E24F182-DE75-D141-B72A-8599E29248A5}" type="datetime1">
               <a:rPr lang="zh-CN" altLang="en-US" smtClean="0"/>
-              <a:t>2026/2/2</a:t>
+              <a:t>2026/9/16</a:t>
             </a:fld>
             <a:endParaRPr lang="en-US"/>
           </a:p>
@@ -3929,7 +4014,7 @@
           <a:p>
             <a:fld id="{8E8C2D7A-8A1B-DA48-9B0B-0DEE102746F0}" type="datetime1">
               <a:rPr lang="zh-CN" altLang="en-US" smtClean="0"/>
-              <a:t>2026/2/2</a:t>
+              <a:t>2026/9/16</a:t>
             </a:fld>
             <a:endParaRPr lang="en-US"/>
           </a:p>
@@ -4020,7 +4105,7 @@
           <a:p>
             <a:fld id="{4153C787-59C9-0445-8F38-642A8469076F}" type="datetime1">
               <a:rPr lang="zh-CN" altLang="en-US" smtClean="0"/>
-              <a:t>2026/2/2</a:t>
+              <a:t>2026/9/16</a:t>
             </a:fld>
             <a:endParaRPr lang="en-US"/>
           </a:p>
@@ -4291,7 +4376,7 @@
           <a:p>
             <a:fld id="{44D50209-807A-E542-A52E-D898C2D2B27F}" type="datetime1">
               <a:rPr lang="zh-CN" altLang="en-US" smtClean="0"/>
-              <a:t>2026/2/2</a:t>
+              <a:t>2026/9/16</a:t>
             </a:fld>
             <a:endParaRPr lang="en-US"/>
           </a:p>
@@ -4542,7 +4627,7 @@
           <a:p>
             <a:fld id="{4EC27158-6770-8C48-8082-76913598A291}" type="datetime1">
               <a:rPr lang="zh-CN" altLang="en-US" smtClean="0"/>
-              <a:t>2026/2/2</a:t>
+              <a:t>2026/9/16</a:t>
             </a:fld>
             <a:endParaRPr lang="en-US"/>
           </a:p>
@@ -4749,7 +4834,7 @@
           <a:p>
             <a:fld id="{6619FEBD-E571-1443-AA22-BB9E67C15179}" type="datetime1">
               <a:rPr lang="zh-CN" altLang="en-US" smtClean="0"/>
-              <a:t>2026/2/2</a:t>
+              <a:t>2026/9/16</a:t>
             </a:fld>
             <a:endParaRPr lang="en-US"/>
           </a:p>
@@ -5448,7 +5533,7 @@
             </a:ln>
             <a:extLst>
               <a:ext uri="{909E8E84-426E-40dd-AFC4-6F175D3DCCD1}">
-                <a14:hiddenFill xmlns:a14="http://schemas.microsoft.com/office/drawing/2010/main" xmlns="">
+                <a14:hiddenFill xmlns="" xmlns:a14="http://schemas.microsoft.com/office/drawing/2010/main">
                   <a:noFill/>
                 </a14:hiddenFill>
               </a:ext>
@@ -5516,7 +5601,7 @@
             </a:ln>
             <a:extLst>
               <a:ext uri="{909E8E84-426E-40dd-AFC4-6F175D3DCCD1}">
-                <a14:hiddenFill xmlns:a14="http://schemas.microsoft.com/office/drawing/2010/main" xmlns="">
+                <a14:hiddenFill xmlns="" xmlns:a14="http://schemas.microsoft.com/office/drawing/2010/main">
                   <a:noFill/>
                 </a14:hiddenFill>
               </a:ext>
@@ -5584,7 +5669,7 @@
             </a:ln>
             <a:extLst>
               <a:ext uri="{909E8E84-426E-40dd-AFC4-6F175D3DCCD1}">
-                <a14:hiddenFill xmlns:a14="http://schemas.microsoft.com/office/drawing/2010/main" xmlns="">
+                <a14:hiddenFill xmlns="" xmlns:a14="http://schemas.microsoft.com/office/drawing/2010/main">
                   <a:noFill/>
                 </a14:hiddenFill>
               </a:ext>
@@ -10898,37 +10983,6 @@
           </a:p>
         </p:txBody>
       </p:sp>
-      <p:sp>
-        <p:nvSpPr>
-          <p:cNvPr id="16" name="矩形 3"/>
-          <p:cNvSpPr/>
-          <p:nvPr/>
-        </p:nvSpPr>
-        <p:spPr>
-          <a:xfrm>
-            <a:off x="2079650" y="4164888"/>
-            <a:ext cx="4109901" cy="415498"/>
-          </a:xfrm>
-          <a:prstGeom prst="rect">
-            <a:avLst/>
-          </a:prstGeom>
-        </p:spPr>
-        <p:txBody>
-          <a:bodyPr wrap="square">
-            <a:spAutoFit/>
-          </a:bodyPr>
-          <a:lstStyle/>
-          <a:p>
-            <a:r>
-              <a:rPr lang="en-US" altLang="zh-CN" sz="2100" dirty="0">
-                <a:latin typeface="Consolas"/>
-                <a:cs typeface="Consolas"/>
-              </a:rPr>
-              <a:t>return x &amp; 0x7fffffff;</a:t>
-            </a:r>
-          </a:p>
-        </p:txBody>
-      </p:sp>
       <p:cxnSp>
         <p:nvCxnSpPr>
           <p:cNvPr id="5" name="Straight Arrow Connector 4">
@@ -11123,6 +11177,708 @@
     <p:extLst>
       <p:ext uri="{BB962C8B-B14F-4D97-AF65-F5344CB8AC3E}">
         <p14:creationId xmlns:p14="http://schemas.microsoft.com/office/powerpoint/2010/main" val="2091908479"/>
+      </p:ext>
+    </p:extLst>
+  </p:cSld>
+  <p:clrMapOvr>
+    <a:masterClrMapping/>
+  </p:clrMapOvr>
+  <p:timing>
+    <p:tnLst>
+      <p:par>
+        <p:cTn id="1" dur="indefinite" restart="never" nodeType="tmRoot">
+          <p:childTnLst>
+            <p:seq concurrent="1" nextAc="seek">
+              <p:cTn id="2" dur="indefinite" nodeType="mainSeq">
+                <p:childTnLst>
+                  <p:par>
+                    <p:cTn id="3" fill="hold">
+                      <p:stCondLst>
+                        <p:cond delay="indefinite"/>
+                      </p:stCondLst>
+                      <p:childTnLst>
+                        <p:par>
+                          <p:cTn id="4" fill="hold">
+                            <p:stCondLst>
+                              <p:cond delay="0"/>
+                            </p:stCondLst>
+                            <p:childTnLst>
+                              <p:par>
+                                <p:cTn id="5" presetID="1" presetClass="entr" presetSubtype="0" fill="hold" nodeType="clickEffect">
+                                  <p:stCondLst>
+                                    <p:cond delay="0"/>
+                                  </p:stCondLst>
+                                  <p:childTnLst>
+                                    <p:set>
+                                      <p:cBhvr>
+                                        <p:cTn id="6" dur="1" fill="hold">
+                                          <p:stCondLst>
+                                            <p:cond delay="0"/>
+                                          </p:stCondLst>
+                                        </p:cTn>
+                                        <p:tgtEl>
+                                          <p:spTgt spid="5"/>
+                                        </p:tgtEl>
+                                        <p:attrNameLst>
+                                          <p:attrName>style.visibility</p:attrName>
+                                        </p:attrNameLst>
+                                      </p:cBhvr>
+                                      <p:to>
+                                        <p:strVal val="visible"/>
+                                      </p:to>
+                                    </p:set>
+                                  </p:childTnLst>
+                                </p:cTn>
+                              </p:par>
+                              <p:par>
+                                <p:cTn id="7" presetID="1" presetClass="entr" presetSubtype="0" fill="hold" grpId="0" nodeType="withEffect">
+                                  <p:stCondLst>
+                                    <p:cond delay="0"/>
+                                  </p:stCondLst>
+                                  <p:childTnLst>
+                                    <p:set>
+                                      <p:cBhvr>
+                                        <p:cTn id="8" dur="1" fill="hold">
+                                          <p:stCondLst>
+                                            <p:cond delay="0"/>
+                                          </p:stCondLst>
+                                        </p:cTn>
+                                        <p:tgtEl>
+                                          <p:spTgt spid="6"/>
+                                        </p:tgtEl>
+                                        <p:attrNameLst>
+                                          <p:attrName>style.visibility</p:attrName>
+                                        </p:attrNameLst>
+                                      </p:cBhvr>
+                                      <p:to>
+                                        <p:strVal val="visible"/>
+                                      </p:to>
+                                    </p:set>
+                                  </p:childTnLst>
+                                </p:cTn>
+                              </p:par>
+                            </p:childTnLst>
+                          </p:cTn>
+                        </p:par>
+                      </p:childTnLst>
+                    </p:cTn>
+                  </p:par>
+                  <p:par>
+                    <p:cTn id="9" fill="hold">
+                      <p:stCondLst>
+                        <p:cond delay="indefinite"/>
+                      </p:stCondLst>
+                      <p:childTnLst>
+                        <p:par>
+                          <p:cTn id="10" fill="hold">
+                            <p:stCondLst>
+                              <p:cond delay="0"/>
+                            </p:stCondLst>
+                            <p:childTnLst>
+                              <p:par>
+                                <p:cTn id="11" presetID="1" presetClass="exit" presetSubtype="0" fill="hold" grpId="0" nodeType="clickEffect">
+                                  <p:stCondLst>
+                                    <p:cond delay="0"/>
+                                  </p:stCondLst>
+                                  <p:childTnLst>
+                                    <p:set>
+                                      <p:cBhvr>
+                                        <p:cTn id="12" dur="1" fill="hold">
+                                          <p:stCondLst>
+                                            <p:cond delay="0"/>
+                                          </p:stCondLst>
+                                        </p:cTn>
+                                        <p:tgtEl>
+                                          <p:spTgt spid="7"/>
+                                        </p:tgtEl>
+                                        <p:attrNameLst>
+                                          <p:attrName>style.visibility</p:attrName>
+                                        </p:attrNameLst>
+                                      </p:cBhvr>
+                                      <p:to>
+                                        <p:strVal val="hidden"/>
+                                      </p:to>
+                                    </p:set>
+                                  </p:childTnLst>
+                                </p:cTn>
+                              </p:par>
+                            </p:childTnLst>
+                          </p:cTn>
+                        </p:par>
+                      </p:childTnLst>
+                    </p:cTn>
+                  </p:par>
+                  <p:par>
+                    <p:cTn id="13" fill="hold">
+                      <p:stCondLst>
+                        <p:cond delay="indefinite"/>
+                      </p:stCondLst>
+                      <p:childTnLst>
+                        <p:par>
+                          <p:cTn id="14" fill="hold">
+                            <p:stCondLst>
+                              <p:cond delay="0"/>
+                            </p:stCondLst>
+                            <p:childTnLst>
+                              <p:par>
+                                <p:cTn id="15" presetID="1" presetClass="exit" presetSubtype="0" fill="hold" grpId="0" nodeType="clickEffect">
+                                  <p:stCondLst>
+                                    <p:cond delay="0"/>
+                                  </p:stCondLst>
+                                  <p:childTnLst>
+                                    <p:set>
+                                      <p:cBhvr>
+                                        <p:cTn id="16" dur="1" fill="hold">
+                                          <p:stCondLst>
+                                            <p:cond delay="0"/>
+                                          </p:stCondLst>
+                                        </p:cTn>
+                                        <p:tgtEl>
+                                          <p:spTgt spid="8"/>
+                                        </p:tgtEl>
+                                        <p:attrNameLst>
+                                          <p:attrName>style.visibility</p:attrName>
+                                        </p:attrNameLst>
+                                      </p:cBhvr>
+                                      <p:to>
+                                        <p:strVal val="hidden"/>
+                                      </p:to>
+                                    </p:set>
+                                  </p:childTnLst>
+                                </p:cTn>
+                              </p:par>
+                            </p:childTnLst>
+                          </p:cTn>
+                        </p:par>
+                      </p:childTnLst>
+                    </p:cTn>
+                  </p:par>
+                  <p:par>
+                    <p:cTn id="17" fill="hold">
+                      <p:stCondLst>
+                        <p:cond delay="indefinite"/>
+                      </p:stCondLst>
+                      <p:childTnLst>
+                        <p:par>
+                          <p:cTn id="18" fill="hold">
+                            <p:stCondLst>
+                              <p:cond delay="0"/>
+                            </p:stCondLst>
+                            <p:childTnLst>
+                              <p:par>
+                                <p:cTn id="19" presetID="1" presetClass="entr" presetSubtype="0" fill="hold" grpId="0" nodeType="clickEffect">
+                                  <p:stCondLst>
+                                    <p:cond delay="0"/>
+                                  </p:stCondLst>
+                                  <p:childTnLst>
+                                    <p:set>
+                                      <p:cBhvr>
+                                        <p:cTn id="20" dur="1" fill="hold">
+                                          <p:stCondLst>
+                                            <p:cond delay="0"/>
+                                          </p:stCondLst>
+                                        </p:cTn>
+                                        <p:tgtEl>
+                                          <p:spTgt spid="14"/>
+                                        </p:tgtEl>
+                                        <p:attrNameLst>
+                                          <p:attrName>style.visibility</p:attrName>
+                                        </p:attrNameLst>
+                                      </p:cBhvr>
+                                      <p:to>
+                                        <p:strVal val="visible"/>
+                                      </p:to>
+                                    </p:set>
+                                  </p:childTnLst>
+                                </p:cTn>
+                              </p:par>
+                            </p:childTnLst>
+                          </p:cTn>
+                        </p:par>
+                      </p:childTnLst>
+                    </p:cTn>
+                  </p:par>
+                </p:childTnLst>
+              </p:cTn>
+              <p:prevCondLst>
+                <p:cond evt="onPrev" delay="0">
+                  <p:tgtEl>
+                    <p:sldTgt/>
+                  </p:tgtEl>
+                </p:cond>
+              </p:prevCondLst>
+              <p:nextCondLst>
+                <p:cond evt="onNext" delay="0">
+                  <p:tgtEl>
+                    <p:sldTgt/>
+                  </p:tgtEl>
+                </p:cond>
+              </p:nextCondLst>
+            </p:seq>
+          </p:childTnLst>
+        </p:cTn>
+      </p:par>
+    </p:tnLst>
+    <p:bldLst>
+      <p:bldP spid="14" grpId="0" animBg="1"/>
+      <p:bldP spid="6" grpId="0"/>
+      <p:bldP spid="7" grpId="0" animBg="1"/>
+      <p:bldP spid="8" grpId="0" animBg="1"/>
+    </p:bldLst>
+  </p:timing>
+</p:sld>
+</file>
+
+<file path=ppt/slides/slide18.xml><?xml version="1.0" encoding="utf-8"?>
+<p:sld xmlns:a="http://schemas.openxmlformats.org/drawingml/2006/main" xmlns:r="http://schemas.openxmlformats.org/officeDocument/2006/relationships" xmlns:p="http://schemas.openxmlformats.org/presentationml/2006/main" show="0">
+  <p:cSld>
+    <p:spTree>
+      <p:nvGrpSpPr>
+        <p:cNvPr id="1" name="">
+          <a:extLst>
+            <a:ext uri="{FF2B5EF4-FFF2-40B4-BE49-F238E27FC236}">
+              <a16:creationId xmlns:a16="http://schemas.microsoft.com/office/drawing/2014/main" id="{26196046-F65F-2524-5FD0-7EAE22CCEA8A}"/>
+            </a:ext>
+          </a:extLst>
+        </p:cNvPr>
+        <p:cNvGrpSpPr/>
+        <p:nvPr/>
+      </p:nvGrpSpPr>
+      <p:grpSpPr>
+        <a:xfrm>
+          <a:off x="0" y="0"/>
+          <a:ext cx="0" cy="0"/>
+          <a:chOff x="0" y="0"/>
+          <a:chExt cx="0" cy="0"/>
+        </a:xfrm>
+      </p:grpSpPr>
+      <p:sp>
+        <p:nvSpPr>
+          <p:cNvPr id="2" name="标题 1">
+            <a:extLst>
+              <a:ext uri="{FF2B5EF4-FFF2-40B4-BE49-F238E27FC236}">
+                <a16:creationId xmlns:a16="http://schemas.microsoft.com/office/drawing/2014/main" id="{8FC6A6CA-FDBD-655D-A684-74002DCD6D31}"/>
+              </a:ext>
+            </a:extLst>
+          </p:cNvPr>
+          <p:cNvSpPr>
+            <a:spLocks noGrp="1"/>
+          </p:cNvSpPr>
+          <p:nvPr>
+            <p:ph type="title"/>
+          </p:nvPr>
+        </p:nvSpPr>
+        <p:spPr/>
+        <p:txBody>
+          <a:bodyPr/>
+          <a:lstStyle/>
+          <a:p>
+            <a:r>
+              <a:rPr kumimoji="1" lang="en-US" altLang="zh-CN" dirty="0"/>
+              <a:t>Example use of &amp;</a:t>
+            </a:r>
+            <a:endParaRPr kumimoji="1" lang="zh-CN" altLang="en-US" dirty="0"/>
+          </a:p>
+        </p:txBody>
+      </p:sp>
+      <p:sp>
+        <p:nvSpPr>
+          <p:cNvPr id="3" name="内容占位符 2">
+            <a:extLst>
+              <a:ext uri="{FF2B5EF4-FFF2-40B4-BE49-F238E27FC236}">
+                <a16:creationId xmlns:a16="http://schemas.microsoft.com/office/drawing/2014/main" id="{A049C6C4-2BCB-A3DD-C605-7B04761C3C23}"/>
+              </a:ext>
+            </a:extLst>
+          </p:cNvPr>
+          <p:cNvSpPr>
+            <a:spLocks noGrp="1"/>
+          </p:cNvSpPr>
+          <p:nvPr>
+            <p:ph idx="1"/>
+          </p:nvPr>
+        </p:nvSpPr>
+        <p:spPr>
+          <a:xfrm>
+            <a:off x="1485900" y="2057401"/>
+            <a:ext cx="6172200" cy="1048545"/>
+          </a:xfrm>
+        </p:spPr>
+        <p:txBody>
+          <a:bodyPr>
+            <a:normAutofit fontScale="85000" lnSpcReduction="20000"/>
+          </a:bodyPr>
+          <a:lstStyle/>
+          <a:p>
+            <a:r>
+              <a:rPr kumimoji="1" lang="en-US" altLang="zh-CN" dirty="0">
+                <a:latin typeface="Verdana"/>
+                <a:cs typeface="Verdana"/>
+              </a:rPr>
+              <a:t>&amp; is often used to mask off bits</a:t>
+            </a:r>
+          </a:p>
+          <a:p>
+            <a:pPr marL="457200" lvl="1" indent="0">
+              <a:buNone/>
+            </a:pPr>
+            <a:r>
+              <a:rPr kumimoji="1" lang="en-US" altLang="zh-CN" dirty="0">
+                <a:latin typeface="Verdana"/>
+                <a:cs typeface="Verdana"/>
+              </a:rPr>
+              <a:t>b &amp; 0 = 0</a:t>
+            </a:r>
+          </a:p>
+          <a:p>
+            <a:pPr marL="457200" lvl="1" indent="0">
+              <a:buNone/>
+            </a:pPr>
+            <a:r>
+              <a:rPr kumimoji="1" lang="en-US" altLang="zh-CN" dirty="0">
+                <a:latin typeface="Verdana"/>
+                <a:cs typeface="Verdana"/>
+              </a:rPr>
+              <a:t>b &amp; 1 = b</a:t>
+            </a:r>
+          </a:p>
+        </p:txBody>
+      </p:sp>
+      <p:sp>
+        <p:nvSpPr>
+          <p:cNvPr id="14" name="矩形 3">
+            <a:extLst>
+              <a:ext uri="{FF2B5EF4-FFF2-40B4-BE49-F238E27FC236}">
+                <a16:creationId xmlns:a16="http://schemas.microsoft.com/office/drawing/2014/main" id="{D0EB19F3-67F2-2408-2AB9-6FF314984904}"/>
+              </a:ext>
+            </a:extLst>
+          </p:cNvPr>
+          <p:cNvSpPr/>
+          <p:nvPr/>
+        </p:nvSpPr>
+        <p:spPr>
+          <a:xfrm>
+            <a:off x="1744880" y="3680140"/>
+            <a:ext cx="4109901" cy="1384995"/>
+          </a:xfrm>
+          <a:prstGeom prst="rect">
+            <a:avLst/>
+          </a:prstGeom>
+          <a:solidFill>
+            <a:schemeClr val="accent1">
+              <a:lumMod val="20000"/>
+              <a:lumOff val="80000"/>
+            </a:schemeClr>
+          </a:solidFill>
+        </p:spPr>
+        <p:txBody>
+          <a:bodyPr wrap="square">
+            <a:spAutoFit/>
+          </a:bodyPr>
+          <a:lstStyle/>
+          <a:p>
+            <a:r>
+              <a:rPr lang="en-US" altLang="zh-CN" sz="2100" dirty="0" err="1">
+                <a:latin typeface="Consolas"/>
+                <a:cs typeface="Consolas"/>
+              </a:rPr>
+              <a:t>int</a:t>
+            </a:r>
+            <a:r>
+              <a:rPr lang="en-US" altLang="zh-CN" sz="2100" dirty="0">
+                <a:latin typeface="Consolas"/>
+                <a:cs typeface="Consolas"/>
+              </a:rPr>
+              <a:t> </a:t>
+            </a:r>
+            <a:r>
+              <a:rPr lang="en-US" altLang="zh-CN" sz="2100" dirty="0" err="1">
+                <a:latin typeface="Consolas"/>
+                <a:cs typeface="Consolas"/>
+              </a:rPr>
+              <a:t>clear_msb</a:t>
+            </a:r>
+            <a:r>
+              <a:rPr lang="en-US" altLang="zh-CN" sz="2100" dirty="0">
+                <a:latin typeface="Consolas"/>
+                <a:cs typeface="Consolas"/>
+              </a:rPr>
+              <a:t>(</a:t>
+            </a:r>
+            <a:r>
+              <a:rPr lang="en-US" altLang="zh-CN" sz="2100" dirty="0" err="1">
+                <a:latin typeface="Consolas"/>
+                <a:cs typeface="Consolas"/>
+              </a:rPr>
+              <a:t>int</a:t>
+            </a:r>
+            <a:r>
+              <a:rPr lang="en-US" altLang="zh-CN" sz="2100" dirty="0">
+                <a:latin typeface="Consolas"/>
+                <a:cs typeface="Consolas"/>
+              </a:rPr>
+              <a:t> x) {</a:t>
+            </a:r>
+          </a:p>
+          <a:p>
+            <a:r>
+              <a:rPr lang="en-US" altLang="zh-CN" sz="2100" dirty="0">
+                <a:latin typeface="Consolas"/>
+                <a:cs typeface="Consolas"/>
+              </a:rPr>
+              <a:t>   </a:t>
+            </a:r>
+          </a:p>
+          <a:p>
+            <a:r>
+              <a:rPr lang="en-US" altLang="zh-CN" sz="2100" dirty="0">
+                <a:latin typeface="Consolas"/>
+                <a:cs typeface="Consolas"/>
+              </a:rPr>
+              <a:t>    </a:t>
+            </a:r>
+          </a:p>
+          <a:p>
+            <a:r>
+              <a:rPr lang="en-US" altLang="zh-CN" sz="2100" dirty="0">
+                <a:latin typeface="Consolas"/>
+                <a:cs typeface="Consolas"/>
+              </a:rPr>
+              <a:t>}</a:t>
+            </a:r>
+          </a:p>
+        </p:txBody>
+      </p:sp>
+      <p:sp>
+        <p:nvSpPr>
+          <p:cNvPr id="16" name="矩形 3">
+            <a:extLst>
+              <a:ext uri="{FF2B5EF4-FFF2-40B4-BE49-F238E27FC236}">
+                <a16:creationId xmlns:a16="http://schemas.microsoft.com/office/drawing/2014/main" id="{B1641475-B362-FDF0-8EA4-C957323EE5FC}"/>
+              </a:ext>
+            </a:extLst>
+          </p:cNvPr>
+          <p:cNvSpPr/>
+          <p:nvPr/>
+        </p:nvSpPr>
+        <p:spPr>
+          <a:xfrm>
+            <a:off x="2079650" y="4164888"/>
+            <a:ext cx="4109901" cy="415498"/>
+          </a:xfrm>
+          <a:prstGeom prst="rect">
+            <a:avLst/>
+          </a:prstGeom>
+        </p:spPr>
+        <p:txBody>
+          <a:bodyPr wrap="square">
+            <a:spAutoFit/>
+          </a:bodyPr>
+          <a:lstStyle/>
+          <a:p>
+            <a:r>
+              <a:rPr lang="en-US" altLang="zh-CN" sz="2100" dirty="0">
+                <a:latin typeface="Consolas"/>
+                <a:cs typeface="Consolas"/>
+              </a:rPr>
+              <a:t>return x &amp; 0x7fffffff;</a:t>
+            </a:r>
+          </a:p>
+        </p:txBody>
+      </p:sp>
+      <p:cxnSp>
+        <p:nvCxnSpPr>
+          <p:cNvPr id="5" name="Straight Arrow Connector 4">
+            <a:extLst>
+              <a:ext uri="{FF2B5EF4-FFF2-40B4-BE49-F238E27FC236}">
+                <a16:creationId xmlns:a16="http://schemas.microsoft.com/office/drawing/2014/main" id="{5125C462-A197-BF43-C03A-8BAB8868D672}"/>
+              </a:ext>
+            </a:extLst>
+          </p:cNvPr>
+          <p:cNvCxnSpPr/>
+          <p:nvPr/>
+        </p:nvCxnSpPr>
+        <p:spPr>
+          <a:xfrm flipV="1">
+            <a:off x="1433632" y="2673415"/>
+            <a:ext cx="582413" cy="151634"/>
+          </a:xfrm>
+          <a:prstGeom prst="straightConnector1">
+            <a:avLst/>
+          </a:prstGeom>
+          <a:ln>
+            <a:tailEnd type="triangle"/>
+          </a:ln>
+        </p:spPr>
+        <p:style>
+          <a:lnRef idx="1">
+            <a:schemeClr val="accent1"/>
+          </a:lnRef>
+          <a:fillRef idx="0">
+            <a:schemeClr val="accent1"/>
+          </a:fillRef>
+          <a:effectRef idx="0">
+            <a:schemeClr val="accent1"/>
+          </a:effectRef>
+          <a:fontRef idx="minor">
+            <a:schemeClr val="tx1"/>
+          </a:fontRef>
+        </p:style>
+      </p:cxnSp>
+      <p:sp>
+        <p:nvSpPr>
+          <p:cNvPr id="6" name="TextBox 5">
+            <a:extLst>
+              <a:ext uri="{FF2B5EF4-FFF2-40B4-BE49-F238E27FC236}">
+                <a16:creationId xmlns:a16="http://schemas.microsoft.com/office/drawing/2014/main" id="{56A6F56B-677B-A91E-43EE-34EC24497586}"/>
+              </a:ext>
+            </a:extLst>
+          </p:cNvPr>
+          <p:cNvSpPr txBox="1"/>
+          <p:nvPr/>
+        </p:nvSpPr>
+        <p:spPr>
+          <a:xfrm>
+            <a:off x="713370" y="2774574"/>
+            <a:ext cx="938077" cy="300082"/>
+          </a:xfrm>
+          <a:prstGeom prst="rect">
+            <a:avLst/>
+          </a:prstGeom>
+          <a:noFill/>
+        </p:spPr>
+        <p:txBody>
+          <a:bodyPr wrap="none" rtlCol="0">
+            <a:spAutoFit/>
+          </a:bodyPr>
+          <a:lstStyle/>
+          <a:p>
+            <a:r>
+              <a:rPr lang="en-US" sz="1350" dirty="0"/>
+              <a:t>b is any bit</a:t>
+            </a:r>
+          </a:p>
+        </p:txBody>
+      </p:sp>
+      <p:sp>
+        <p:nvSpPr>
+          <p:cNvPr id="7" name="Rectangle: Rounded Corners 6">
+            <a:extLst>
+              <a:ext uri="{FF2B5EF4-FFF2-40B4-BE49-F238E27FC236}">
+                <a16:creationId xmlns:a16="http://schemas.microsoft.com/office/drawing/2014/main" id="{9A4631C4-CE09-F761-341C-181FBFAEA089}"/>
+              </a:ext>
+            </a:extLst>
+          </p:cNvPr>
+          <p:cNvSpPr/>
+          <p:nvPr/>
+        </p:nvSpPr>
+        <p:spPr>
+          <a:xfrm>
+            <a:off x="3005114" y="2394213"/>
+            <a:ext cx="537612" cy="316893"/>
+          </a:xfrm>
+          <a:prstGeom prst="roundRect">
+            <a:avLst/>
+          </a:prstGeom>
+          <a:solidFill>
+            <a:schemeClr val="accent2">
+              <a:lumMod val="40000"/>
+              <a:lumOff val="60000"/>
+            </a:schemeClr>
+          </a:solidFill>
+          <a:ln>
+            <a:noFill/>
+          </a:ln>
+        </p:spPr>
+        <p:style>
+          <a:lnRef idx="2">
+            <a:schemeClr val="accent1">
+              <a:shade val="50000"/>
+            </a:schemeClr>
+          </a:lnRef>
+          <a:fillRef idx="1">
+            <a:schemeClr val="accent1"/>
+          </a:fillRef>
+          <a:effectRef idx="0">
+            <a:schemeClr val="accent1"/>
+          </a:effectRef>
+          <a:fontRef idx="minor">
+            <a:schemeClr val="lt1"/>
+          </a:fontRef>
+        </p:style>
+        <p:txBody>
+          <a:bodyPr rtlCol="0" anchor="ctr"/>
+          <a:lstStyle/>
+          <a:p>
+            <a:pPr algn="ctr"/>
+            <a:r>
+              <a:rPr lang="en-US" sz="1350" dirty="0"/>
+              <a:t>?</a:t>
+            </a:r>
+          </a:p>
+        </p:txBody>
+      </p:sp>
+      <p:sp>
+        <p:nvSpPr>
+          <p:cNvPr id="8" name="Rectangle: Rounded Corners 7">
+            <a:extLst>
+              <a:ext uri="{FF2B5EF4-FFF2-40B4-BE49-F238E27FC236}">
+                <a16:creationId xmlns:a16="http://schemas.microsoft.com/office/drawing/2014/main" id="{2B356C2B-A95B-CF25-078D-52DA186D76ED}"/>
+              </a:ext>
+            </a:extLst>
+          </p:cNvPr>
+          <p:cNvSpPr/>
+          <p:nvPr/>
+        </p:nvSpPr>
+        <p:spPr>
+          <a:xfrm>
+            <a:off x="3005114" y="2734680"/>
+            <a:ext cx="537612" cy="316893"/>
+          </a:xfrm>
+          <a:prstGeom prst="roundRect">
+            <a:avLst/>
+          </a:prstGeom>
+          <a:solidFill>
+            <a:schemeClr val="accent2">
+              <a:lumMod val="40000"/>
+              <a:lumOff val="60000"/>
+            </a:schemeClr>
+          </a:solidFill>
+          <a:ln>
+            <a:noFill/>
+          </a:ln>
+        </p:spPr>
+        <p:style>
+          <a:lnRef idx="2">
+            <a:schemeClr val="accent1">
+              <a:shade val="50000"/>
+            </a:schemeClr>
+          </a:lnRef>
+          <a:fillRef idx="1">
+            <a:schemeClr val="accent1"/>
+          </a:fillRef>
+          <a:effectRef idx="0">
+            <a:schemeClr val="accent1"/>
+          </a:effectRef>
+          <a:fontRef idx="minor">
+            <a:schemeClr val="lt1"/>
+          </a:fontRef>
+        </p:style>
+        <p:txBody>
+          <a:bodyPr rtlCol="0" anchor="ctr"/>
+          <a:lstStyle/>
+          <a:p>
+            <a:pPr algn="ctr"/>
+            <a:r>
+              <a:rPr lang="en-US" sz="1350" dirty="0"/>
+              <a:t>?</a:t>
+            </a:r>
+          </a:p>
+        </p:txBody>
+      </p:sp>
+    </p:spTree>
+    <p:extLst>
+      <p:ext uri="{BB962C8B-B14F-4D97-AF65-F5344CB8AC3E}">
+        <p14:creationId xmlns:p14="http://schemas.microsoft.com/office/powerpoint/2010/main" val="4216587252"/>
       </p:ext>
     </p:extLst>
   </p:cSld>
@@ -11421,7 +12177,7 @@
 </p:sld>
 </file>
 
-<file path=ppt/slides/slide18.xml><?xml version="1.0" encoding="utf-8"?>
+<file path=ppt/slides/slide19.xml><?xml version="1.0" encoding="utf-8"?>
 <p:sld xmlns:a="http://schemas.openxmlformats.org/drawingml/2006/main" xmlns:r="http://schemas.openxmlformats.org/officeDocument/2006/relationships" xmlns:p="http://schemas.openxmlformats.org/presentationml/2006/main">
   <p:cSld>
     <p:spTree>
@@ -12936,7 +13692,111 @@
 </p:sld>
 </file>
 
-<file path=ppt/slides/slide19.xml><?xml version="1.0" encoding="utf-8"?>
+<file path=ppt/slides/slide2.xml><?xml version="1.0" encoding="utf-8"?>
+<p:sld xmlns:a="http://schemas.openxmlformats.org/drawingml/2006/main" xmlns:r="http://schemas.openxmlformats.org/officeDocument/2006/relationships" xmlns:p="http://schemas.openxmlformats.org/presentationml/2006/main">
+  <p:cSld>
+    <p:spTree>
+      <p:nvGrpSpPr>
+        <p:cNvPr id="1" name=""/>
+        <p:cNvGrpSpPr/>
+        <p:nvPr/>
+      </p:nvGrpSpPr>
+      <p:grpSpPr>
+        <a:xfrm>
+          <a:off x="0" y="0"/>
+          <a:ext cx="0" cy="0"/>
+          <a:chOff x="0" y="0"/>
+          <a:chExt cx="0" cy="0"/>
+        </a:xfrm>
+      </p:grpSpPr>
+      <p:sp>
+        <p:nvSpPr>
+          <p:cNvPr id="2" name="Title 1">
+            <a:extLst>
+              <a:ext uri="{FF2B5EF4-FFF2-40B4-BE49-F238E27FC236}">
+                <a16:creationId xmlns:a16="http://schemas.microsoft.com/office/drawing/2014/main" id="{AB7F77F5-62F3-4267-8762-62BB6F55F34E}"/>
+              </a:ext>
+            </a:extLst>
+          </p:cNvPr>
+          <p:cNvSpPr>
+            <a:spLocks noGrp="1"/>
+          </p:cNvSpPr>
+          <p:nvPr>
+            <p:ph type="title"/>
+          </p:nvPr>
+        </p:nvSpPr>
+        <p:spPr/>
+        <p:txBody>
+          <a:bodyPr/>
+          <a:lstStyle/>
+          <a:p>
+            <a:r>
+              <a:rPr lang="en-US" dirty="0"/>
+              <a:t>Lesson plan</a:t>
+            </a:r>
+          </a:p>
+        </p:txBody>
+      </p:sp>
+      <p:sp>
+        <p:nvSpPr>
+          <p:cNvPr id="3" name="Content Placeholder 2">
+            <a:extLst>
+              <a:ext uri="{FF2B5EF4-FFF2-40B4-BE49-F238E27FC236}">
+                <a16:creationId xmlns:a16="http://schemas.microsoft.com/office/drawing/2014/main" id="{51BE0845-D3BA-42FD-94C1-C6B2C825EF26}"/>
+              </a:ext>
+            </a:extLst>
+          </p:cNvPr>
+          <p:cNvSpPr>
+            <a:spLocks noGrp="1"/>
+          </p:cNvSpPr>
+          <p:nvPr>
+            <p:ph idx="1"/>
+          </p:nvPr>
+        </p:nvSpPr>
+        <p:spPr/>
+        <p:txBody>
+          <a:bodyPr/>
+          <a:lstStyle/>
+          <a:p>
+            <a:r>
+              <a:rPr lang="en-US" dirty="0"/>
+              <a:t>Overview</a:t>
+            </a:r>
+          </a:p>
+          <a:p>
+            <a:r>
+              <a:rPr lang="en-US" dirty="0"/>
+              <a:t>C program organization</a:t>
+            </a:r>
+          </a:p>
+          <a:p>
+            <a:r>
+              <a:rPr lang="en-US" dirty="0"/>
+              <a:t>Bitwise operators</a:t>
+            </a:r>
+          </a:p>
+          <a:p>
+            <a:r>
+              <a:rPr lang="en-US" dirty="0"/>
+              <a:t>Control flow</a:t>
+            </a:r>
+          </a:p>
+        </p:txBody>
+      </p:sp>
+    </p:spTree>
+    <p:extLst>
+      <p:ext uri="{BB962C8B-B14F-4D97-AF65-F5344CB8AC3E}">
+        <p14:creationId xmlns:p14="http://schemas.microsoft.com/office/powerpoint/2010/main" val="2509973299"/>
+      </p:ext>
+    </p:extLst>
+  </p:cSld>
+  <p:clrMapOvr>
+    <a:masterClrMapping/>
+  </p:clrMapOvr>
+</p:sld>
+</file>
+
+<file path=ppt/slides/slide20.xml><?xml version="1.0" encoding="utf-8"?>
 <p:sld xmlns:a="http://schemas.openxmlformats.org/drawingml/2006/main" xmlns:r="http://schemas.openxmlformats.org/officeDocument/2006/relationships" xmlns:p="http://schemas.openxmlformats.org/presentationml/2006/main">
   <p:cSld>
     <p:spTree>
@@ -13760,111 +14620,7 @@
 </p:sld>
 </file>
 
-<file path=ppt/slides/slide2.xml><?xml version="1.0" encoding="utf-8"?>
-<p:sld xmlns:a="http://schemas.openxmlformats.org/drawingml/2006/main" xmlns:r="http://schemas.openxmlformats.org/officeDocument/2006/relationships" xmlns:p="http://schemas.openxmlformats.org/presentationml/2006/main">
-  <p:cSld>
-    <p:spTree>
-      <p:nvGrpSpPr>
-        <p:cNvPr id="1" name=""/>
-        <p:cNvGrpSpPr/>
-        <p:nvPr/>
-      </p:nvGrpSpPr>
-      <p:grpSpPr>
-        <a:xfrm>
-          <a:off x="0" y="0"/>
-          <a:ext cx="0" cy="0"/>
-          <a:chOff x="0" y="0"/>
-          <a:chExt cx="0" cy="0"/>
-        </a:xfrm>
-      </p:grpSpPr>
-      <p:sp>
-        <p:nvSpPr>
-          <p:cNvPr id="2" name="Title 1">
-            <a:extLst>
-              <a:ext uri="{FF2B5EF4-FFF2-40B4-BE49-F238E27FC236}">
-                <a16:creationId xmlns:a16="http://schemas.microsoft.com/office/drawing/2014/main" id="{AB7F77F5-62F3-4267-8762-62BB6F55F34E}"/>
-              </a:ext>
-            </a:extLst>
-          </p:cNvPr>
-          <p:cNvSpPr>
-            <a:spLocks noGrp="1"/>
-          </p:cNvSpPr>
-          <p:nvPr>
-            <p:ph type="title"/>
-          </p:nvPr>
-        </p:nvSpPr>
-        <p:spPr/>
-        <p:txBody>
-          <a:bodyPr/>
-          <a:lstStyle/>
-          <a:p>
-            <a:r>
-              <a:rPr lang="en-US" dirty="0"/>
-              <a:t>Lesson plan</a:t>
-            </a:r>
-          </a:p>
-        </p:txBody>
-      </p:sp>
-      <p:sp>
-        <p:nvSpPr>
-          <p:cNvPr id="3" name="Content Placeholder 2">
-            <a:extLst>
-              <a:ext uri="{FF2B5EF4-FFF2-40B4-BE49-F238E27FC236}">
-                <a16:creationId xmlns:a16="http://schemas.microsoft.com/office/drawing/2014/main" id="{51BE0845-D3BA-42FD-94C1-C6B2C825EF26}"/>
-              </a:ext>
-            </a:extLst>
-          </p:cNvPr>
-          <p:cNvSpPr>
-            <a:spLocks noGrp="1"/>
-          </p:cNvSpPr>
-          <p:nvPr>
-            <p:ph idx="1"/>
-          </p:nvPr>
-        </p:nvSpPr>
-        <p:spPr/>
-        <p:txBody>
-          <a:bodyPr/>
-          <a:lstStyle/>
-          <a:p>
-            <a:r>
-              <a:rPr lang="en-US" dirty="0"/>
-              <a:t>Overview</a:t>
-            </a:r>
-          </a:p>
-          <a:p>
-            <a:r>
-              <a:rPr lang="en-US" dirty="0"/>
-              <a:t>C program organization</a:t>
-            </a:r>
-          </a:p>
-          <a:p>
-            <a:r>
-              <a:rPr lang="en-US" dirty="0"/>
-              <a:t>Bitwise operators</a:t>
-            </a:r>
-          </a:p>
-          <a:p>
-            <a:r>
-              <a:rPr lang="en-US" dirty="0"/>
-              <a:t>Control flow</a:t>
-            </a:r>
-          </a:p>
-        </p:txBody>
-      </p:sp>
-    </p:spTree>
-    <p:extLst>
-      <p:ext uri="{BB962C8B-B14F-4D97-AF65-F5344CB8AC3E}">
-        <p14:creationId xmlns:p14="http://schemas.microsoft.com/office/powerpoint/2010/main" val="2509973299"/>
-      </p:ext>
-    </p:extLst>
-  </p:cSld>
-  <p:clrMapOvr>
-    <a:masterClrMapping/>
-  </p:clrMapOvr>
-</p:sld>
-</file>
-
-<file path=ppt/slides/slide20.xml><?xml version="1.0" encoding="utf-8"?>
+<file path=ppt/slides/slide21.xml><?xml version="1.0" encoding="utf-8"?>
 <p:sld xmlns:a="http://schemas.openxmlformats.org/drawingml/2006/main" xmlns:r="http://schemas.openxmlformats.org/officeDocument/2006/relationships" xmlns:p="http://schemas.openxmlformats.org/presentationml/2006/main">
   <p:cSld>
     <p:spTree>
@@ -14437,7 +15193,7 @@
 </p:sld>
 </file>
 
-<file path=ppt/slides/slide21.xml><?xml version="1.0" encoding="utf-8"?>
+<file path=ppt/slides/slide22.xml><?xml version="1.0" encoding="utf-8"?>
 <p:sld xmlns:a="http://schemas.openxmlformats.org/drawingml/2006/main" xmlns:r="http://schemas.openxmlformats.org/officeDocument/2006/relationships" xmlns:p="http://schemas.openxmlformats.org/presentationml/2006/main">
   <p:cSld>
     <p:spTree>
@@ -15261,7 +16017,7 @@
 </p:sld>
 </file>
 
-<file path=ppt/slides/slide22.xml><?xml version="1.0" encoding="utf-8"?>
+<file path=ppt/slides/slide23.xml><?xml version="1.0" encoding="utf-8"?>
 <p:sld xmlns:a="http://schemas.openxmlformats.org/drawingml/2006/main" xmlns:r="http://schemas.openxmlformats.org/officeDocument/2006/relationships" xmlns:p="http://schemas.openxmlformats.org/presentationml/2006/main">
   <p:cSld>
     <p:spTree>
@@ -15337,7 +16093,7 @@
         </p:spPr>
         <p:txBody>
           <a:bodyPr>
-            <a:normAutofit fontScale="85000" lnSpcReduction="20000"/>
+            <a:normAutofit fontScale="70000" lnSpcReduction="20000"/>
           </a:bodyPr>
           <a:lstStyle/>
           <a:p>
@@ -15346,7 +16102,7 @@
                 <a:latin typeface="Verdana"/>
                 <a:cs typeface="Verdana"/>
               </a:rPr>
-              <a:t>^ can be used to toggle a bit</a:t>
+              <a:t>^ can be used to selectively toggle a bit</a:t>
             </a:r>
           </a:p>
           <a:p>
@@ -15656,7 +16412,7 @@
 </p:sld>
 </file>
 
-<file path=ppt/slides/slide23.xml><?xml version="1.0" encoding="utf-8"?>
+<file path=ppt/slides/slide24.xml><?xml version="1.0" encoding="utf-8"?>
 <p:sld xmlns:a="http://schemas.openxmlformats.org/drawingml/2006/main" xmlns:r="http://schemas.openxmlformats.org/officeDocument/2006/relationships" xmlns:p="http://schemas.openxmlformats.org/presentationml/2006/main">
   <p:cSld>
     <p:spTree>
@@ -16096,7 +16852,7 @@
 </p:sld>
 </file>
 
-<file path=ppt/slides/slide24.xml><?xml version="1.0" encoding="utf-8"?>
+<file path=ppt/slides/slide25.xml><?xml version="1.0" encoding="utf-8"?>
 <p:sld xmlns:a="http://schemas.openxmlformats.org/drawingml/2006/main" xmlns:r="http://schemas.openxmlformats.org/officeDocument/2006/relationships" xmlns:p="http://schemas.openxmlformats.org/presentationml/2006/main">
   <p:cSld>
     <p:spTree>
@@ -16771,7 +17527,7 @@
 </p:sld>
 </file>
 
-<file path=ppt/slides/slide25.xml><?xml version="1.0" encoding="utf-8"?>
+<file path=ppt/slides/slide26.xml><?xml version="1.0" encoding="utf-8"?>
 <p:sld xmlns:a="http://schemas.openxmlformats.org/drawingml/2006/main" xmlns:r="http://schemas.openxmlformats.org/officeDocument/2006/relationships" xmlns:p="http://schemas.openxmlformats.org/presentationml/2006/main">
   <p:cSld>
     <p:spTree>
@@ -17378,7 +18134,7 @@
 </p:sld>
 </file>
 
-<file path=ppt/slides/slide26.xml><?xml version="1.0" encoding="utf-8"?>
+<file path=ppt/slides/slide27.xml><?xml version="1.0" encoding="utf-8"?>
 <p:sld xmlns:a="http://schemas.openxmlformats.org/drawingml/2006/main" xmlns:r="http://schemas.openxmlformats.org/officeDocument/2006/relationships" xmlns:p="http://schemas.openxmlformats.org/presentationml/2006/main">
   <p:cSld>
     <p:spTree>
@@ -17934,7 +18690,7 @@
 </p:sld>
 </file>
 
-<file path=ppt/slides/slide27.xml><?xml version="1.0" encoding="utf-8"?>
+<file path=ppt/slides/slide28.xml><?xml version="1.0" encoding="utf-8"?>
 <p:sld xmlns:a="http://schemas.openxmlformats.org/drawingml/2006/main" xmlns:r="http://schemas.openxmlformats.org/officeDocument/2006/relationships" xmlns:p="http://schemas.openxmlformats.org/presentationml/2006/main">
   <p:cSld>
     <p:spTree>
@@ -18286,7 +19042,7 @@
 </p:sld>
 </file>
 
-<file path=ppt/slides/slide28.xml><?xml version="1.0" encoding="utf-8"?>
+<file path=ppt/slides/slide29.xml><?xml version="1.0" encoding="utf-8"?>
 <p:sld xmlns:a="http://schemas.openxmlformats.org/drawingml/2006/main" xmlns:r="http://schemas.openxmlformats.org/officeDocument/2006/relationships" xmlns:p="http://schemas.openxmlformats.org/presentationml/2006/main" show="0">
   <p:cSld>
     <p:bg>
@@ -18438,7 +19194,214 @@
 </p:sld>
 </file>
 
-<file path=ppt/slides/slide29.xml><?xml version="1.0" encoding="utf-8"?>
+<file path=ppt/slides/slide3.xml><?xml version="1.0" encoding="utf-8"?>
+<p:sld xmlns:a="http://schemas.openxmlformats.org/drawingml/2006/main" xmlns:r="http://schemas.openxmlformats.org/officeDocument/2006/relationships" xmlns:p="http://schemas.openxmlformats.org/presentationml/2006/main">
+  <p:cSld>
+    <p:spTree>
+      <p:nvGrpSpPr>
+        <p:cNvPr id="1" name=""/>
+        <p:cNvGrpSpPr/>
+        <p:nvPr/>
+      </p:nvGrpSpPr>
+      <p:grpSpPr>
+        <a:xfrm>
+          <a:off x="0" y="0"/>
+          <a:ext cx="0" cy="0"/>
+          <a:chOff x="0" y="0"/>
+          <a:chExt cx="0" cy="0"/>
+        </a:xfrm>
+      </p:grpSpPr>
+      <p:sp>
+        <p:nvSpPr>
+          <p:cNvPr id="12" name="矩形 11"/>
+          <p:cNvSpPr/>
+          <p:nvPr/>
+        </p:nvSpPr>
+        <p:spPr>
+          <a:xfrm>
+            <a:off x="426525" y="2186746"/>
+            <a:ext cx="1090363" cy="369332"/>
+          </a:xfrm>
+          <a:prstGeom prst="rect">
+            <a:avLst/>
+          </a:prstGeom>
+        </p:spPr>
+        <p:txBody>
+          <a:bodyPr wrap="none">
+            <a:spAutoFit/>
+          </a:bodyPr>
+          <a:lstStyle/>
+          <a:p>
+            <a:r>
+              <a:rPr lang="en-US" altLang="zh-CN" dirty="0">
+                <a:latin typeface="Chalkduster"/>
+                <a:cs typeface="Chalkduster"/>
+              </a:rPr>
+              <a:t>C (1972)</a:t>
+            </a:r>
+            <a:endParaRPr lang="zh-CN" altLang="en-US" dirty="0">
+              <a:latin typeface="Chalkduster"/>
+              <a:cs typeface="Chalkduster"/>
+            </a:endParaRPr>
+          </a:p>
+        </p:txBody>
+      </p:sp>
+      <p:pic>
+        <p:nvPicPr>
+          <p:cNvPr id="2" name="Picture 1" descr="a34e4dfea45b48909e9cfc369f7d869e--operating-system-steve-jobs.jpg"/>
+          <p:cNvPicPr>
+            <a:picLocks noChangeAspect="1"/>
+          </p:cNvPicPr>
+          <p:nvPr/>
+        </p:nvPicPr>
+        <p:blipFill>
+          <a:blip r:embed="rId3">
+            <a:extLst>
+              <a:ext uri="{28A0092B-C50C-407E-A947-70E740481C1C}">
+                <a14:useLocalDpi xmlns:a14="http://schemas.microsoft.com/office/drawing/2010/main" val="0"/>
+              </a:ext>
+            </a:extLst>
+          </a:blip>
+          <a:stretch>
+            <a:fillRect/>
+          </a:stretch>
+        </p:blipFill>
+        <p:spPr>
+          <a:xfrm>
+            <a:off x="487742" y="2573656"/>
+            <a:ext cx="4155408" cy="2527447"/>
+          </a:xfrm>
+          <a:prstGeom prst="rect">
+            <a:avLst/>
+          </a:prstGeom>
+        </p:spPr>
+      </p:pic>
+      <p:sp>
+        <p:nvSpPr>
+          <p:cNvPr id="3" name="Title 2">
+            <a:extLst>
+              <a:ext uri="{FF2B5EF4-FFF2-40B4-BE49-F238E27FC236}">
+                <a16:creationId xmlns:a16="http://schemas.microsoft.com/office/drawing/2014/main" id="{80D06DB8-90E9-4F49-8240-32EFA77189E1}"/>
+              </a:ext>
+            </a:extLst>
+          </p:cNvPr>
+          <p:cNvSpPr>
+            <a:spLocks noGrp="1"/>
+          </p:cNvSpPr>
+          <p:nvPr>
+            <p:ph type="title"/>
+          </p:nvPr>
+        </p:nvSpPr>
+        <p:spPr>
+          <a:xfrm>
+            <a:off x="426525" y="155279"/>
+            <a:ext cx="8229600" cy="1143000"/>
+          </a:xfrm>
+        </p:spPr>
+        <p:txBody>
+          <a:bodyPr>
+            <a:normAutofit/>
+          </a:bodyPr>
+          <a:lstStyle/>
+          <a:p>
+            <a:r>
+              <a:rPr lang="en-US" dirty="0"/>
+              <a:t>C is an old programming language</a:t>
+            </a:r>
+          </a:p>
+        </p:txBody>
+      </p:sp>
+      <p:pic>
+        <p:nvPicPr>
+          <p:cNvPr id="5" name="Picture 4" descr="kidscomputer.jpg">
+            <a:extLst>
+              <a:ext uri="{FF2B5EF4-FFF2-40B4-BE49-F238E27FC236}">
+                <a16:creationId xmlns:a16="http://schemas.microsoft.com/office/drawing/2014/main" id="{F9F00BCA-74C3-4A5A-8E31-7B47D98DC6F0}"/>
+              </a:ext>
+            </a:extLst>
+          </p:cNvPr>
+          <p:cNvPicPr>
+            <a:picLocks noChangeAspect="1"/>
+          </p:cNvPicPr>
+          <p:nvPr/>
+        </p:nvPicPr>
+        <p:blipFill>
+          <a:blip r:embed="rId4">
+            <a:extLst>
+              <a:ext uri="{28A0092B-C50C-407E-A947-70E740481C1C}">
+                <a14:useLocalDpi xmlns:a14="http://schemas.microsoft.com/office/drawing/2010/main" val="0"/>
+              </a:ext>
+            </a:extLst>
+          </a:blip>
+          <a:stretch>
+            <a:fillRect/>
+          </a:stretch>
+        </p:blipFill>
+        <p:spPr>
+          <a:xfrm>
+            <a:off x="4989395" y="2556078"/>
+            <a:ext cx="3579549" cy="2513220"/>
+          </a:xfrm>
+          <a:prstGeom prst="rect">
+            <a:avLst/>
+          </a:prstGeom>
+        </p:spPr>
+      </p:pic>
+      <p:sp>
+        <p:nvSpPr>
+          <p:cNvPr id="7" name="矩形 11">
+            <a:extLst>
+              <a:ext uri="{FF2B5EF4-FFF2-40B4-BE49-F238E27FC236}">
+                <a16:creationId xmlns:a16="http://schemas.microsoft.com/office/drawing/2014/main" id="{E58EA93E-8C11-45B5-99AB-95AF95E918A6}"/>
+              </a:ext>
+            </a:extLst>
+          </p:cNvPr>
+          <p:cNvSpPr/>
+          <p:nvPr/>
+        </p:nvSpPr>
+        <p:spPr>
+          <a:xfrm>
+            <a:off x="4892778" y="2186746"/>
+            <a:ext cx="4155408" cy="369332"/>
+          </a:xfrm>
+          <a:prstGeom prst="rect">
+            <a:avLst/>
+          </a:prstGeom>
+        </p:spPr>
+        <p:txBody>
+          <a:bodyPr wrap="square">
+            <a:spAutoFit/>
+          </a:bodyPr>
+          <a:lstStyle/>
+          <a:p>
+            <a:r>
+              <a:rPr lang="en-US" altLang="zh-CN" dirty="0">
+                <a:latin typeface="Chalkduster"/>
+                <a:cs typeface="Chalkduster"/>
+              </a:rPr>
+              <a:t>Java (1995) Python (2.0, 2000)</a:t>
+            </a:r>
+            <a:endParaRPr lang="zh-CN" altLang="en-US" dirty="0">
+              <a:latin typeface="Chalkduster"/>
+              <a:cs typeface="Chalkduster"/>
+            </a:endParaRPr>
+          </a:p>
+        </p:txBody>
+      </p:sp>
+    </p:spTree>
+    <p:extLst>
+      <p:ext uri="{BB962C8B-B14F-4D97-AF65-F5344CB8AC3E}">
+        <p14:creationId xmlns:p14="http://schemas.microsoft.com/office/powerpoint/2010/main" val="1674384587"/>
+      </p:ext>
+    </p:extLst>
+  </p:cSld>
+  <p:clrMapOvr>
+    <a:masterClrMapping/>
+  </p:clrMapOvr>
+</p:sld>
+</file>
+
+<file path=ppt/slides/slide30.xml><?xml version="1.0" encoding="utf-8"?>
 <p:sld xmlns:a="http://schemas.openxmlformats.org/drawingml/2006/main" xmlns:r="http://schemas.openxmlformats.org/officeDocument/2006/relationships" xmlns:p="http://schemas.openxmlformats.org/presentationml/2006/main" show="0">
   <p:cSld>
     <p:spTree>
@@ -19159,214 +20122,7 @@
 </p:sld>
 </file>
 
-<file path=ppt/slides/slide3.xml><?xml version="1.0" encoding="utf-8"?>
-<p:sld xmlns:a="http://schemas.openxmlformats.org/drawingml/2006/main" xmlns:r="http://schemas.openxmlformats.org/officeDocument/2006/relationships" xmlns:p="http://schemas.openxmlformats.org/presentationml/2006/main">
-  <p:cSld>
-    <p:spTree>
-      <p:nvGrpSpPr>
-        <p:cNvPr id="1" name=""/>
-        <p:cNvGrpSpPr/>
-        <p:nvPr/>
-      </p:nvGrpSpPr>
-      <p:grpSpPr>
-        <a:xfrm>
-          <a:off x="0" y="0"/>
-          <a:ext cx="0" cy="0"/>
-          <a:chOff x="0" y="0"/>
-          <a:chExt cx="0" cy="0"/>
-        </a:xfrm>
-      </p:grpSpPr>
-      <p:sp>
-        <p:nvSpPr>
-          <p:cNvPr id="12" name="矩形 11"/>
-          <p:cNvSpPr/>
-          <p:nvPr/>
-        </p:nvSpPr>
-        <p:spPr>
-          <a:xfrm>
-            <a:off x="426525" y="2186746"/>
-            <a:ext cx="1090363" cy="369332"/>
-          </a:xfrm>
-          <a:prstGeom prst="rect">
-            <a:avLst/>
-          </a:prstGeom>
-        </p:spPr>
-        <p:txBody>
-          <a:bodyPr wrap="none">
-            <a:spAutoFit/>
-          </a:bodyPr>
-          <a:lstStyle/>
-          <a:p>
-            <a:r>
-              <a:rPr lang="en-US" altLang="zh-CN" dirty="0">
-                <a:latin typeface="Chalkduster"/>
-                <a:cs typeface="Chalkduster"/>
-              </a:rPr>
-              <a:t>C (1972)</a:t>
-            </a:r>
-            <a:endParaRPr lang="zh-CN" altLang="en-US" dirty="0">
-              <a:latin typeface="Chalkduster"/>
-              <a:cs typeface="Chalkduster"/>
-            </a:endParaRPr>
-          </a:p>
-        </p:txBody>
-      </p:sp>
-      <p:pic>
-        <p:nvPicPr>
-          <p:cNvPr id="2" name="Picture 1" descr="a34e4dfea45b48909e9cfc369f7d869e--operating-system-steve-jobs.jpg"/>
-          <p:cNvPicPr>
-            <a:picLocks noChangeAspect="1"/>
-          </p:cNvPicPr>
-          <p:nvPr/>
-        </p:nvPicPr>
-        <p:blipFill>
-          <a:blip r:embed="rId3">
-            <a:extLst>
-              <a:ext uri="{28A0092B-C50C-407E-A947-70E740481C1C}">
-                <a14:useLocalDpi xmlns:a14="http://schemas.microsoft.com/office/drawing/2010/main" val="0"/>
-              </a:ext>
-            </a:extLst>
-          </a:blip>
-          <a:stretch>
-            <a:fillRect/>
-          </a:stretch>
-        </p:blipFill>
-        <p:spPr>
-          <a:xfrm>
-            <a:off x="487742" y="2573656"/>
-            <a:ext cx="4155408" cy="2527447"/>
-          </a:xfrm>
-          <a:prstGeom prst="rect">
-            <a:avLst/>
-          </a:prstGeom>
-        </p:spPr>
-      </p:pic>
-      <p:sp>
-        <p:nvSpPr>
-          <p:cNvPr id="3" name="Title 2">
-            <a:extLst>
-              <a:ext uri="{FF2B5EF4-FFF2-40B4-BE49-F238E27FC236}">
-                <a16:creationId xmlns:a16="http://schemas.microsoft.com/office/drawing/2014/main" id="{80D06DB8-90E9-4F49-8240-32EFA77189E1}"/>
-              </a:ext>
-            </a:extLst>
-          </p:cNvPr>
-          <p:cNvSpPr>
-            <a:spLocks noGrp="1"/>
-          </p:cNvSpPr>
-          <p:nvPr>
-            <p:ph type="title"/>
-          </p:nvPr>
-        </p:nvSpPr>
-        <p:spPr>
-          <a:xfrm>
-            <a:off x="426525" y="155279"/>
-            <a:ext cx="8229600" cy="1143000"/>
-          </a:xfrm>
-        </p:spPr>
-        <p:txBody>
-          <a:bodyPr>
-            <a:normAutofit/>
-          </a:bodyPr>
-          <a:lstStyle/>
-          <a:p>
-            <a:r>
-              <a:rPr lang="en-US" dirty="0"/>
-              <a:t>C is an old programming language</a:t>
-            </a:r>
-          </a:p>
-        </p:txBody>
-      </p:sp>
-      <p:pic>
-        <p:nvPicPr>
-          <p:cNvPr id="5" name="Picture 4" descr="kidscomputer.jpg">
-            <a:extLst>
-              <a:ext uri="{FF2B5EF4-FFF2-40B4-BE49-F238E27FC236}">
-                <a16:creationId xmlns:a16="http://schemas.microsoft.com/office/drawing/2014/main" id="{F9F00BCA-74C3-4A5A-8E31-7B47D98DC6F0}"/>
-              </a:ext>
-            </a:extLst>
-          </p:cNvPr>
-          <p:cNvPicPr>
-            <a:picLocks noChangeAspect="1"/>
-          </p:cNvPicPr>
-          <p:nvPr/>
-        </p:nvPicPr>
-        <p:blipFill>
-          <a:blip r:embed="rId4">
-            <a:extLst>
-              <a:ext uri="{28A0092B-C50C-407E-A947-70E740481C1C}">
-                <a14:useLocalDpi xmlns:a14="http://schemas.microsoft.com/office/drawing/2010/main" val="0"/>
-              </a:ext>
-            </a:extLst>
-          </a:blip>
-          <a:stretch>
-            <a:fillRect/>
-          </a:stretch>
-        </p:blipFill>
-        <p:spPr>
-          <a:xfrm>
-            <a:off x="4989395" y="2556078"/>
-            <a:ext cx="3579549" cy="2513220"/>
-          </a:xfrm>
-          <a:prstGeom prst="rect">
-            <a:avLst/>
-          </a:prstGeom>
-        </p:spPr>
-      </p:pic>
-      <p:sp>
-        <p:nvSpPr>
-          <p:cNvPr id="7" name="矩形 11">
-            <a:extLst>
-              <a:ext uri="{FF2B5EF4-FFF2-40B4-BE49-F238E27FC236}">
-                <a16:creationId xmlns:a16="http://schemas.microsoft.com/office/drawing/2014/main" id="{E58EA93E-8C11-45B5-99AB-95AF95E918A6}"/>
-              </a:ext>
-            </a:extLst>
-          </p:cNvPr>
-          <p:cNvSpPr/>
-          <p:nvPr/>
-        </p:nvSpPr>
-        <p:spPr>
-          <a:xfrm>
-            <a:off x="4892778" y="2186746"/>
-            <a:ext cx="4155408" cy="369332"/>
-          </a:xfrm>
-          <a:prstGeom prst="rect">
-            <a:avLst/>
-          </a:prstGeom>
-        </p:spPr>
-        <p:txBody>
-          <a:bodyPr wrap="square">
-            <a:spAutoFit/>
-          </a:bodyPr>
-          <a:lstStyle/>
-          <a:p>
-            <a:r>
-              <a:rPr lang="en-US" altLang="zh-CN" dirty="0">
-                <a:latin typeface="Chalkduster"/>
-                <a:cs typeface="Chalkduster"/>
-              </a:rPr>
-              <a:t>Java (1995) Python (2.0, 2000)</a:t>
-            </a:r>
-            <a:endParaRPr lang="zh-CN" altLang="en-US" dirty="0">
-              <a:latin typeface="Chalkduster"/>
-              <a:cs typeface="Chalkduster"/>
-            </a:endParaRPr>
-          </a:p>
-        </p:txBody>
-      </p:sp>
-    </p:spTree>
-    <p:extLst>
-      <p:ext uri="{BB962C8B-B14F-4D97-AF65-F5344CB8AC3E}">
-        <p14:creationId xmlns:p14="http://schemas.microsoft.com/office/powerpoint/2010/main" val="1674384587"/>
-      </p:ext>
-    </p:extLst>
-  </p:cSld>
-  <p:clrMapOvr>
-    <a:masterClrMapping/>
-  </p:clrMapOvr>
-</p:sld>
-</file>
-
-<file path=ppt/slides/slide30.xml><?xml version="1.0" encoding="utf-8"?>
+<file path=ppt/slides/slide31.xml><?xml version="1.0" encoding="utf-8"?>
 <p:sld xmlns:a="http://schemas.openxmlformats.org/drawingml/2006/main" xmlns:r="http://schemas.openxmlformats.org/officeDocument/2006/relationships" xmlns:p="http://schemas.openxmlformats.org/presentationml/2006/main" show="0">
   <p:cSld>
     <p:spTree>
@@ -19727,7 +20483,7 @@
 </p:sld>
 </file>
 
-<file path=ppt/slides/slide31.xml><?xml version="1.0" encoding="utf-8"?>
+<file path=ppt/slides/slide32.xml><?xml version="1.0" encoding="utf-8"?>
 <p:sld xmlns:a="http://schemas.openxmlformats.org/drawingml/2006/main" xmlns:r="http://schemas.openxmlformats.org/officeDocument/2006/relationships" xmlns:p="http://schemas.openxmlformats.org/presentationml/2006/main">
   <p:cSld>
     <p:spTree>
@@ -19852,7 +20608,7 @@
 </p:sld>
 </file>
 
-<file path=ppt/slides/slide32.xml><?xml version="1.0" encoding="utf-8"?>
+<file path=ppt/slides/slide33.xml><?xml version="1.0" encoding="utf-8"?>
 <p:sld xmlns:a="http://schemas.openxmlformats.org/drawingml/2006/main" xmlns:r="http://schemas.openxmlformats.org/officeDocument/2006/relationships" xmlns:p="http://schemas.openxmlformats.org/presentationml/2006/main">
   <p:cSld>
     <p:spTree>
@@ -19974,7 +20730,7 @@
 </p:sld>
 </file>
 
-<file path=ppt/slides/slide33.xml><?xml version="1.0" encoding="utf-8"?>
+<file path=ppt/slides/slide34.xml><?xml version="1.0" encoding="utf-8"?>
 <p:sld xmlns:a="http://schemas.openxmlformats.org/drawingml/2006/main" xmlns:r="http://schemas.openxmlformats.org/officeDocument/2006/relationships" xmlns:p="http://schemas.openxmlformats.org/presentationml/2006/main">
   <p:cSld>
     <p:spTree>
@@ -20998,7 +21754,7 @@
 </p:sld>
 </file>
 
-<file path=ppt/slides/slide34.xml><?xml version="1.0" encoding="utf-8"?>
+<file path=ppt/slides/slide35.xml><?xml version="1.0" encoding="utf-8"?>
 <p:sld xmlns:a="http://schemas.openxmlformats.org/drawingml/2006/main" xmlns:r="http://schemas.openxmlformats.org/officeDocument/2006/relationships" xmlns:p="http://schemas.openxmlformats.org/presentationml/2006/main">
   <p:cSld>
     <p:spTree>
@@ -21091,7 +21847,7 @@
 </p:sld>
 </file>
 
-<file path=ppt/slides/slide35.xml><?xml version="1.0" encoding="utf-8"?>
+<file path=ppt/slides/slide36.xml><?xml version="1.0" encoding="utf-8"?>
 <p:sld xmlns:a="http://schemas.openxmlformats.org/drawingml/2006/main" xmlns:r="http://schemas.openxmlformats.org/officeDocument/2006/relationships" xmlns:p="http://schemas.openxmlformats.org/presentationml/2006/main">
   <p:cSld>
     <p:spTree>
@@ -21181,7 +21937,7 @@
 </p:sld>
 </file>
 
-<file path=ppt/slides/slide36.xml><?xml version="1.0" encoding="utf-8"?>
+<file path=ppt/slides/slide37.xml><?xml version="1.0" encoding="utf-8"?>
 <p:sld xmlns:a="http://schemas.openxmlformats.org/drawingml/2006/main" xmlns:r="http://schemas.openxmlformats.org/officeDocument/2006/relationships" xmlns:p="http://schemas.openxmlformats.org/presentationml/2006/main">
   <p:cSld>
     <p:spTree>
@@ -21467,7 +22223,7 @@
 </p:sld>
 </file>
 
-<file path=ppt/slides/slide37.xml><?xml version="1.0" encoding="utf-8"?>
+<file path=ppt/slides/slide38.xml><?xml version="1.0" encoding="utf-8"?>
 <p:sld xmlns:a="http://schemas.openxmlformats.org/drawingml/2006/main" xmlns:r="http://schemas.openxmlformats.org/officeDocument/2006/relationships" xmlns:p="http://schemas.openxmlformats.org/presentationml/2006/main">
   <p:cSld>
     <p:spTree>
@@ -21593,170 +22349,6 @@
     <p:extLst>
       <p:ext uri="{BB962C8B-B14F-4D97-AF65-F5344CB8AC3E}">
         <p14:creationId xmlns:p14="http://schemas.microsoft.com/office/powerpoint/2010/main" val="3657704657"/>
-      </p:ext>
-    </p:extLst>
-  </p:cSld>
-  <p:clrMapOvr>
-    <a:masterClrMapping/>
-  </p:clrMapOvr>
-</p:sld>
-</file>
-
-<file path=ppt/slides/slide38.xml><?xml version="1.0" encoding="utf-8"?>
-<p:sld xmlns:a="http://schemas.openxmlformats.org/drawingml/2006/main" xmlns:r="http://schemas.openxmlformats.org/officeDocument/2006/relationships" xmlns:p="http://schemas.openxmlformats.org/presentationml/2006/main" show="0">
-  <p:cSld>
-    <p:spTree>
-      <p:nvGrpSpPr>
-        <p:cNvPr id="1" name=""/>
-        <p:cNvGrpSpPr/>
-        <p:nvPr/>
-      </p:nvGrpSpPr>
-      <p:grpSpPr>
-        <a:xfrm>
-          <a:off x="0" y="0"/>
-          <a:ext cx="0" cy="0"/>
-          <a:chOff x="0" y="0"/>
-          <a:chExt cx="0" cy="0"/>
-        </a:xfrm>
-      </p:grpSpPr>
-      <p:sp>
-        <p:nvSpPr>
-          <p:cNvPr id="2" name="标题 1"/>
-          <p:cNvSpPr>
-            <a:spLocks noGrp="1"/>
-          </p:cNvSpPr>
-          <p:nvPr>
-            <p:ph type="title"/>
-          </p:nvPr>
-        </p:nvSpPr>
-        <p:spPr/>
-        <p:txBody>
-          <a:bodyPr/>
-          <a:lstStyle/>
-          <a:p>
-            <a:r>
-              <a:rPr kumimoji="1" lang="en-US" altLang="zh-CN" dirty="0"/>
-              <a:t>Exercises</a:t>
-            </a:r>
-            <a:endParaRPr kumimoji="1" lang="zh-CN" altLang="en-US" dirty="0"/>
-          </a:p>
-        </p:txBody>
-      </p:sp>
-      <p:sp>
-        <p:nvSpPr>
-          <p:cNvPr id="3" name="内容占位符 2"/>
-          <p:cNvSpPr>
-            <a:spLocks noGrp="1"/>
-          </p:cNvSpPr>
-          <p:nvPr>
-            <p:ph idx="1"/>
-          </p:nvPr>
-        </p:nvSpPr>
-        <p:spPr/>
-        <p:txBody>
-          <a:bodyPr/>
-          <a:lstStyle/>
-          <a:p>
-            <a:pPr marL="0" indent="0">
-              <a:buNone/>
-            </a:pPr>
-            <a:r>
-              <a:rPr kumimoji="1" lang="en-US" altLang="zh-CN" dirty="0"/>
-              <a:t>Given a number, write a function to decide if it is even? </a:t>
-            </a:r>
-          </a:p>
-          <a:p>
-            <a:pPr marL="0" indent="0">
-              <a:buNone/>
-            </a:pPr>
-            <a:endParaRPr kumimoji="1" lang="en-US" altLang="zh-CN" dirty="0"/>
-          </a:p>
-          <a:p>
-            <a:pPr marL="0" indent="0">
-              <a:buNone/>
-            </a:pPr>
-            <a:endParaRPr kumimoji="1" lang="zh-CN" altLang="en-US" dirty="0"/>
-          </a:p>
-        </p:txBody>
-      </p:sp>
-      <p:sp>
-        <p:nvSpPr>
-          <p:cNvPr id="4" name="矩形 3"/>
-          <p:cNvSpPr/>
-          <p:nvPr/>
-        </p:nvSpPr>
-        <p:spPr>
-          <a:xfrm>
-            <a:off x="802506" y="3180858"/>
-            <a:ext cx="5479868" cy="1384995"/>
-          </a:xfrm>
-          <a:prstGeom prst="rect">
-            <a:avLst/>
-          </a:prstGeom>
-        </p:spPr>
-        <p:txBody>
-          <a:bodyPr wrap="square">
-            <a:spAutoFit/>
-          </a:bodyPr>
-          <a:lstStyle/>
-          <a:p>
-            <a:r>
-              <a:rPr lang="en-US" altLang="zh-CN" sz="2800" dirty="0" err="1">
-                <a:latin typeface="Consolas"/>
-                <a:cs typeface="Consolas"/>
-              </a:rPr>
-              <a:t>bool</a:t>
-            </a:r>
-            <a:r>
-              <a:rPr lang="en-US" altLang="zh-CN" sz="2800" dirty="0">
-                <a:latin typeface="Consolas"/>
-                <a:cs typeface="Consolas"/>
-              </a:rPr>
-              <a:t> </a:t>
-            </a:r>
-            <a:r>
-              <a:rPr lang="en-US" altLang="zh-CN" sz="2800" dirty="0" err="1">
-                <a:latin typeface="Consolas"/>
-                <a:cs typeface="Consolas"/>
-              </a:rPr>
-              <a:t>isEven</a:t>
-            </a:r>
-            <a:r>
-              <a:rPr lang="en-US" altLang="zh-CN" sz="2800" dirty="0">
-                <a:latin typeface="Consolas"/>
-                <a:cs typeface="Consolas"/>
-              </a:rPr>
-              <a:t>(int n) {</a:t>
-            </a:r>
-          </a:p>
-          <a:p>
-            <a:r>
-              <a:rPr lang="en-US" altLang="zh-CN" sz="2800" dirty="0">
-                <a:latin typeface="Consolas"/>
-                <a:cs typeface="Consolas"/>
-              </a:rPr>
-              <a:t>    </a:t>
-            </a:r>
-          </a:p>
-          <a:p>
-            <a:r>
-              <a:rPr lang="en-US" altLang="zh-CN" sz="2800" dirty="0">
-                <a:latin typeface="Consolas"/>
-                <a:cs typeface="Consolas"/>
-              </a:rPr>
-              <a:t>}</a:t>
-            </a:r>
-            <a:endParaRPr lang="zh-CN" altLang="en-US" sz="2800" dirty="0">
-              <a:latin typeface="Consolas"/>
-              <a:cs typeface="Consolas"/>
-            </a:endParaRPr>
-          </a:p>
-        </p:txBody>
-      </p:sp>
-    </p:spTree>
-    <p:extLst>
-      <p:ext uri="{BB962C8B-B14F-4D97-AF65-F5344CB8AC3E}">
-        <p14:creationId xmlns:p14="http://schemas.microsoft.com/office/powerpoint/2010/main" val="3882139285"/>
       </p:ext>
     </p:extLst>
   </p:cSld>
@@ -21852,7 +22444,7 @@
         <p:spPr>
           <a:xfrm>
             <a:off x="802506" y="3180858"/>
-            <a:ext cx="5479868" cy="1877437"/>
+            <a:ext cx="5479868" cy="1384995"/>
           </a:xfrm>
           <a:prstGeom prst="rect">
             <a:avLst/>
@@ -21894,25 +22486,13 @@
             </a:r>
           </a:p>
           <a:p>
-            <a:endParaRPr lang="en-US" altLang="zh-CN" sz="1600" dirty="0">
-              <a:latin typeface="Consolas"/>
-              <a:cs typeface="Consolas"/>
-            </a:endParaRPr>
-          </a:p>
-          <a:p>
             <a:r>
               <a:rPr lang="en-US" altLang="zh-CN" sz="2800" dirty="0">
                 <a:latin typeface="Consolas"/>
                 <a:cs typeface="Consolas"/>
               </a:rPr>
-              <a:t>  return (n &amp; 0x1) == 0;</a:t>
-            </a:r>
-          </a:p>
-          <a:p>
-            <a:endParaRPr lang="en-US" altLang="zh-CN" sz="1600" dirty="0">
-              <a:latin typeface="Consolas"/>
-              <a:cs typeface="Consolas"/>
-            </a:endParaRPr>
+              <a:t>    </a:t>
+            </a:r>
           </a:p>
           <a:p>
             <a:r>
@@ -21932,7 +22512,7 @@
     </p:spTree>
     <p:extLst>
       <p:ext uri="{BB962C8B-B14F-4D97-AF65-F5344CB8AC3E}">
-        <p14:creationId xmlns:p14="http://schemas.microsoft.com/office/powerpoint/2010/main" val="789144896"/>
+        <p14:creationId xmlns:p14="http://schemas.microsoft.com/office/powerpoint/2010/main" val="3882139285"/>
       </p:ext>
     </p:extLst>
   </p:cSld>
@@ -22720,7 +23300,7 @@
                 <a:latin typeface="Consolas"/>
                 <a:cs typeface="Consolas"/>
               </a:rPr>
-              <a:t>  return (n % 2) == 0;</a:t>
+              <a:t>  return (n &amp; 0x1) == 0;</a:t>
             </a:r>
           </a:p>
           <a:p>
@@ -22747,7 +23327,7 @@
     </p:spTree>
     <p:extLst>
       <p:ext uri="{BB962C8B-B14F-4D97-AF65-F5344CB8AC3E}">
-        <p14:creationId xmlns:p14="http://schemas.microsoft.com/office/powerpoint/2010/main" val="3623879904"/>
+        <p14:creationId xmlns:p14="http://schemas.microsoft.com/office/powerpoint/2010/main" val="789144896"/>
       </p:ext>
     </p:extLst>
   </p:cSld>
@@ -22817,7 +23397,7 @@
             </a:pPr>
             <a:r>
               <a:rPr kumimoji="1" lang="en-US" altLang="zh-CN" dirty="0"/>
-              <a:t>Given a number, write a function to decide if it is a power of two? </a:t>
+              <a:t>Given a number, write a function to decide if it is even? </a:t>
             </a:r>
           </a:p>
           <a:p>
@@ -22836,14 +23416,14 @@
       </p:sp>
       <p:sp>
         <p:nvSpPr>
-          <p:cNvPr id="5" name="矩形 4"/>
+          <p:cNvPr id="4" name="矩形 3"/>
           <p:cNvSpPr/>
           <p:nvPr/>
         </p:nvSpPr>
         <p:spPr>
           <a:xfrm>
-            <a:off x="544017" y="3282000"/>
-            <a:ext cx="8344971" cy="1384995"/>
+            <a:off x="802506" y="3180858"/>
+            <a:ext cx="5479868" cy="1877437"/>
           </a:xfrm>
           <a:prstGeom prst="rect">
             <a:avLst/>
@@ -22874,32 +23454,33 @@
                 <a:latin typeface="Consolas"/>
                 <a:cs typeface="Consolas"/>
               </a:rPr>
-              <a:t>isPowerOfTwo</a:t>
+              <a:t>isEven</a:t>
             </a:r>
             <a:r>
               <a:rPr lang="en-US" altLang="zh-CN" sz="2800" dirty="0">
                 <a:latin typeface="Consolas"/>
                 <a:cs typeface="Consolas"/>
               </a:rPr>
-              <a:t>(unsigned </a:t>
-            </a:r>
-            <a:r>
-              <a:rPr lang="en-US" altLang="zh-CN" sz="2800" dirty="0" err="1">
-                <a:latin typeface="Consolas"/>
-                <a:cs typeface="Consolas"/>
-              </a:rPr>
-              <a:t>int</a:t>
-            </a:r>
+              <a:t>(int n) {</a:t>
+            </a:r>
+          </a:p>
+          <a:p>
+            <a:endParaRPr lang="en-US" altLang="zh-CN" sz="1600" dirty="0">
+              <a:latin typeface="Consolas"/>
+              <a:cs typeface="Consolas"/>
+            </a:endParaRPr>
+          </a:p>
+          <a:p>
             <a:r>
               <a:rPr lang="en-US" altLang="zh-CN" sz="2800" dirty="0">
                 <a:latin typeface="Consolas"/>
                 <a:cs typeface="Consolas"/>
               </a:rPr>
-              <a:t> n) {</a:t>
-            </a:r>
-          </a:p>
-          <a:p>
-            <a:endParaRPr lang="en-US" altLang="zh-CN" sz="2800" dirty="0">
+              <a:t>  return (n % 2) == 0;</a:t>
+            </a:r>
+          </a:p>
+          <a:p>
+            <a:endParaRPr lang="en-US" altLang="zh-CN" sz="1600" dirty="0">
               <a:latin typeface="Consolas"/>
               <a:cs typeface="Consolas"/>
             </a:endParaRPr>
@@ -22922,7 +23503,7 @@
     </p:spTree>
     <p:extLst>
       <p:ext uri="{BB962C8B-B14F-4D97-AF65-F5344CB8AC3E}">
-        <p14:creationId xmlns:p14="http://schemas.microsoft.com/office/powerpoint/2010/main" val="849539340"/>
+        <p14:creationId xmlns:p14="http://schemas.microsoft.com/office/powerpoint/2010/main" val="3623879904"/>
       </p:ext>
     </p:extLst>
   </p:cSld>
@@ -22982,12 +23563,7 @@
             <p:ph idx="1"/>
           </p:nvPr>
         </p:nvSpPr>
-        <p:spPr>
-          <a:xfrm>
-            <a:off x="457200" y="1600201"/>
-            <a:ext cx="8229600" cy="1460524"/>
-          </a:xfrm>
-        </p:spPr>
+        <p:spPr/>
         <p:txBody>
           <a:bodyPr/>
           <a:lstStyle/>
@@ -22999,12 +23575,6 @@
               <a:rPr kumimoji="1" lang="en-US" altLang="zh-CN" dirty="0"/>
               <a:t>Given a number, write a function to decide if it is a power of two? </a:t>
             </a:r>
-          </a:p>
-          <a:p>
-            <a:pPr marL="0" indent="0">
-              <a:buNone/>
-            </a:pPr>
-            <a:endParaRPr kumimoji="1" lang="en-US" altLang="zh-CN" dirty="0"/>
           </a:p>
           <a:p>
             <a:pPr marL="0" indent="0">
@@ -23028,8 +23598,8 @@
         </p:nvSpPr>
         <p:spPr>
           <a:xfrm>
-            <a:off x="544017" y="2719826"/>
-            <a:ext cx="8142783" cy="3693318"/>
+            <a:off x="544017" y="3282000"/>
+            <a:ext cx="8344971" cy="1384995"/>
           </a:xfrm>
           <a:prstGeom prst="rect">
             <a:avLst/>
@@ -23042,42 +23612,42 @@
           <a:lstStyle/>
           <a:p>
             <a:r>
-              <a:rPr lang="en-US" altLang="zh-CN" sz="2600" dirty="0" err="1">
+              <a:rPr lang="en-US" altLang="zh-CN" sz="2800" dirty="0" err="1">
                 <a:latin typeface="Consolas"/>
                 <a:cs typeface="Consolas"/>
               </a:rPr>
               <a:t>bool</a:t>
             </a:r>
             <a:r>
-              <a:rPr lang="en-US" altLang="zh-CN" sz="2600" dirty="0">
+              <a:rPr lang="en-US" altLang="zh-CN" sz="2800" dirty="0">
                 <a:latin typeface="Consolas"/>
                 <a:cs typeface="Consolas"/>
               </a:rPr>
               <a:t> </a:t>
             </a:r>
             <a:r>
-              <a:rPr lang="en-US" altLang="zh-CN" sz="2600" dirty="0" err="1">
+              <a:rPr lang="en-US" altLang="zh-CN" sz="2800" dirty="0" err="1">
                 <a:latin typeface="Consolas"/>
                 <a:cs typeface="Consolas"/>
               </a:rPr>
               <a:t>isPowerOfTwo</a:t>
             </a:r>
             <a:r>
-              <a:rPr lang="en-US" altLang="zh-CN" sz="2600" dirty="0">
+              <a:rPr lang="en-US" altLang="zh-CN" sz="2800" dirty="0">
                 <a:latin typeface="Consolas"/>
                 <a:cs typeface="Consolas"/>
               </a:rPr>
               <a:t>(unsigned </a:t>
             </a:r>
             <a:r>
-              <a:rPr lang="en-US" altLang="zh-CN" sz="2600" dirty="0" err="1">
+              <a:rPr lang="en-US" altLang="zh-CN" sz="2800" dirty="0" err="1">
                 <a:latin typeface="Consolas"/>
                 <a:cs typeface="Consolas"/>
               </a:rPr>
               <a:t>int</a:t>
             </a:r>
             <a:r>
-              <a:rPr lang="en-US" altLang="zh-CN" sz="2600" dirty="0">
+              <a:rPr lang="en-US" altLang="zh-CN" sz="2800" dirty="0">
                 <a:latin typeface="Consolas"/>
                 <a:cs typeface="Consolas"/>
               </a:rPr>
@@ -23085,77 +23655,20 @@
             </a:r>
           </a:p>
           <a:p>
-            <a:r>
-              <a:rPr lang="en-US" altLang="zh-CN" sz="2600" dirty="0">
-                <a:latin typeface="Consolas"/>
-                <a:cs typeface="Consolas"/>
-              </a:rPr>
-              <a:t>   if (n==0) return false;</a:t>
-            </a:r>
-          </a:p>
-          <a:p>
-            <a:r>
-              <a:rPr lang="en-US" altLang="zh-CN" sz="2600" dirty="0">
-                <a:latin typeface="Consolas"/>
-                <a:cs typeface="Consolas"/>
-              </a:rPr>
-              <a:t>   while (n &gt; 1) {</a:t>
-            </a:r>
-          </a:p>
-          <a:p>
-            <a:r>
-              <a:rPr lang="en-US" altLang="zh-CN" sz="2600" dirty="0">
-                <a:latin typeface="Consolas"/>
-                <a:cs typeface="Consolas"/>
-              </a:rPr>
-              <a:t>      if (n % 2)  // (n%2)!=0</a:t>
-            </a:r>
-          </a:p>
-          <a:p>
-            <a:r>
-              <a:rPr lang="en-US" altLang="zh-CN" sz="2600" dirty="0">
-                <a:latin typeface="Consolas"/>
-                <a:cs typeface="Consolas"/>
-              </a:rPr>
-              <a:t>         return false; </a:t>
-            </a:r>
-          </a:p>
-          <a:p>
-            <a:r>
-              <a:rPr lang="en-US" altLang="zh-CN" sz="2600" dirty="0">
-                <a:latin typeface="Consolas"/>
-                <a:cs typeface="Consolas"/>
-              </a:rPr>
-              <a:t>      n = n &gt;&gt; 1;</a:t>
-            </a:r>
-          </a:p>
-          <a:p>
-            <a:r>
-              <a:rPr lang="en-US" altLang="zh-CN" sz="2600" dirty="0">
-                <a:latin typeface="Consolas"/>
-                <a:cs typeface="Consolas"/>
-              </a:rPr>
-              <a:t>   }</a:t>
-            </a:r>
-          </a:p>
-          <a:p>
-            <a:r>
-              <a:rPr lang="en-US" altLang="zh-CN" sz="2600" dirty="0">
-                <a:latin typeface="Consolas"/>
-                <a:cs typeface="Consolas"/>
-              </a:rPr>
-              <a:t>   return true;</a:t>
-            </a:r>
-          </a:p>
-          <a:p>
-            <a:r>
-              <a:rPr lang="en-US" altLang="zh-CN" sz="2600" dirty="0">
+            <a:endParaRPr lang="en-US" altLang="zh-CN" sz="2800" dirty="0">
+              <a:latin typeface="Consolas"/>
+              <a:cs typeface="Consolas"/>
+            </a:endParaRPr>
+          </a:p>
+          <a:p>
+            <a:r>
+              <a:rPr lang="en-US" altLang="zh-CN" sz="2800" dirty="0">
                 <a:latin typeface="Consolas"/>
                 <a:cs typeface="Consolas"/>
               </a:rPr>
               <a:t>}</a:t>
             </a:r>
-            <a:endParaRPr lang="zh-CN" altLang="en-US" sz="2600" dirty="0">
+            <a:endParaRPr lang="zh-CN" altLang="en-US" sz="2800" dirty="0">
               <a:latin typeface="Consolas"/>
               <a:cs typeface="Consolas"/>
             </a:endParaRPr>
@@ -23165,7 +23678,7 @@
     </p:spTree>
     <p:extLst>
       <p:ext uri="{BB962C8B-B14F-4D97-AF65-F5344CB8AC3E}">
-        <p14:creationId xmlns:p14="http://schemas.microsoft.com/office/powerpoint/2010/main" val="3789686449"/>
+        <p14:creationId xmlns:p14="http://schemas.microsoft.com/office/powerpoint/2010/main" val="849539340"/>
       </p:ext>
     </p:extLst>
   </p:cSld>
@@ -23225,7 +23738,12 @@
             <p:ph idx="1"/>
           </p:nvPr>
         </p:nvSpPr>
-        <p:spPr/>
+        <p:spPr>
+          <a:xfrm>
+            <a:off x="457200" y="1600201"/>
+            <a:ext cx="8229600" cy="1460524"/>
+          </a:xfrm>
+        </p:spPr>
         <p:txBody>
           <a:bodyPr/>
           <a:lstStyle/>
@@ -23248,20 +23766,26 @@
             <a:pPr marL="0" indent="0">
               <a:buNone/>
             </a:pPr>
+            <a:endParaRPr kumimoji="1" lang="en-US" altLang="zh-CN" dirty="0"/>
+          </a:p>
+          <a:p>
+            <a:pPr marL="0" indent="0">
+              <a:buNone/>
+            </a:pPr>
             <a:endParaRPr kumimoji="1" lang="zh-CN" altLang="en-US" dirty="0"/>
           </a:p>
         </p:txBody>
       </p:sp>
       <p:sp>
         <p:nvSpPr>
-          <p:cNvPr id="4" name="矩形 3"/>
+          <p:cNvPr id="5" name="矩形 4"/>
           <p:cNvSpPr/>
           <p:nvPr/>
         </p:nvSpPr>
         <p:spPr>
           <a:xfrm>
-            <a:off x="802506" y="3180858"/>
-            <a:ext cx="5479868" cy="523220"/>
+            <a:off x="544017" y="2719826"/>
+            <a:ext cx="8142783" cy="3693318"/>
           </a:xfrm>
           <a:prstGeom prst="rect">
             <a:avLst/>
@@ -23273,71 +23797,43 @@
           </a:bodyPr>
           <a:lstStyle/>
           <a:p>
-            <a:endParaRPr lang="zh-CN" altLang="en-US" sz="2800" dirty="0">
-              <a:latin typeface="Consolas"/>
-              <a:cs typeface="Consolas"/>
-            </a:endParaRPr>
-          </a:p>
-        </p:txBody>
-      </p:sp>
-      <p:sp>
-        <p:nvSpPr>
-          <p:cNvPr id="5" name="矩形 4"/>
-          <p:cNvSpPr/>
-          <p:nvPr/>
-        </p:nvSpPr>
-        <p:spPr>
-          <a:xfrm>
-            <a:off x="544017" y="3282000"/>
-            <a:ext cx="8599983" cy="2308324"/>
-          </a:xfrm>
-          <a:prstGeom prst="rect">
-            <a:avLst/>
-          </a:prstGeom>
-        </p:spPr>
-        <p:txBody>
-          <a:bodyPr wrap="square">
-            <a:spAutoFit/>
-          </a:bodyPr>
-          <a:lstStyle/>
-          <a:p>
-            <a:r>
-              <a:rPr lang="en-US" altLang="zh-CN" sz="2800" dirty="0" err="1">
+            <a:r>
+              <a:rPr lang="en-US" altLang="zh-CN" sz="2600" dirty="0" err="1">
                 <a:latin typeface="Consolas"/>
                 <a:cs typeface="Consolas"/>
               </a:rPr>
               <a:t>bool</a:t>
             </a:r>
             <a:r>
-              <a:rPr lang="en-US" altLang="zh-CN" sz="2800" dirty="0">
+              <a:rPr lang="en-US" altLang="zh-CN" sz="2600" dirty="0">
                 <a:latin typeface="Consolas"/>
                 <a:cs typeface="Consolas"/>
               </a:rPr>
               <a:t> </a:t>
             </a:r>
             <a:r>
-              <a:rPr lang="en-US" altLang="zh-CN" sz="2800" dirty="0" err="1">
+              <a:rPr lang="en-US" altLang="zh-CN" sz="2600" dirty="0" err="1">
                 <a:latin typeface="Consolas"/>
                 <a:cs typeface="Consolas"/>
               </a:rPr>
               <a:t>isPowerOfTwo</a:t>
             </a:r>
             <a:r>
-              <a:rPr lang="en-US" altLang="zh-CN" sz="2800" dirty="0">
+              <a:rPr lang="en-US" altLang="zh-CN" sz="2600" dirty="0">
                 <a:latin typeface="Consolas"/>
                 <a:cs typeface="Consolas"/>
               </a:rPr>
               <a:t>(unsigned </a:t>
             </a:r>
             <a:r>
-              <a:rPr lang="en-US" altLang="zh-CN" sz="2800" dirty="0" err="1">
+              <a:rPr lang="en-US" altLang="zh-CN" sz="2600" dirty="0" err="1">
                 <a:latin typeface="Consolas"/>
                 <a:cs typeface="Consolas"/>
               </a:rPr>
               <a:t>int</a:t>
             </a:r>
             <a:r>
-              <a:rPr lang="en-US" altLang="zh-CN" sz="2800" dirty="0">
+              <a:rPr lang="en-US" altLang="zh-CN" sz="2600" dirty="0">
                 <a:latin typeface="Consolas"/>
                 <a:cs typeface="Consolas"/>
               </a:rPr>
@@ -23345,58 +23841,77 @@
             </a:r>
           </a:p>
           <a:p>
-            <a:endParaRPr lang="en-US" altLang="zh-CN" sz="1600" dirty="0">
-              <a:latin typeface="Consolas"/>
-              <a:cs typeface="Consolas"/>
-            </a:endParaRPr>
-          </a:p>
-          <a:p>
-            <a:r>
-              <a:rPr lang="en-US" altLang="zh-CN" sz="2800" dirty="0">
-                <a:latin typeface="Consolas"/>
-                <a:cs typeface="Consolas"/>
-              </a:rPr>
-              <a:t>  return </a:t>
-            </a:r>
-            <a:r>
-              <a:rPr lang="mr-IN" altLang="zh-CN" sz="2800" dirty="0">
-                <a:latin typeface="Consolas"/>
-                <a:cs typeface="Consolas"/>
-              </a:rPr>
-              <a:t>(n &amp; (n-1)</a:t>
-            </a:r>
-            <a:r>
-              <a:rPr lang="en-US" altLang="zh-CN" sz="2800" dirty="0">
-                <a:latin typeface="Consolas"/>
-                <a:cs typeface="Consolas"/>
-              </a:rPr>
-              <a:t>) == 0; </a:t>
-            </a:r>
-          </a:p>
-          <a:p>
-            <a:r>
-              <a:rPr lang="en-US" altLang="zh-CN" sz="2800" dirty="0">
-                <a:latin typeface="Consolas"/>
-                <a:cs typeface="Consolas"/>
-              </a:rPr>
-              <a:t>  // n&amp;(n-1) clears rightmost bit-of-1 in n</a:t>
-            </a:r>
-          </a:p>
-          <a:p>
-            <a:endParaRPr lang="en-US" altLang="zh-CN" sz="1600" dirty="0">
-              <a:latin typeface="Consolas"/>
-              <a:cs typeface="Consolas"/>
-            </a:endParaRPr>
-          </a:p>
-          <a:p>
-            <a:r>
-              <a:rPr lang="en-US" altLang="zh-CN" sz="2800" dirty="0">
+            <a:r>
+              <a:rPr lang="en-US" altLang="zh-CN" sz="2600" dirty="0">
+                <a:latin typeface="Consolas"/>
+                <a:cs typeface="Consolas"/>
+              </a:rPr>
+              <a:t>   if (n==0) return false;</a:t>
+            </a:r>
+          </a:p>
+          <a:p>
+            <a:r>
+              <a:rPr lang="en-US" altLang="zh-CN" sz="2600" dirty="0">
+                <a:latin typeface="Consolas"/>
+                <a:cs typeface="Consolas"/>
+              </a:rPr>
+              <a:t>   while (n &gt; 1) {</a:t>
+            </a:r>
+          </a:p>
+          <a:p>
+            <a:r>
+              <a:rPr lang="en-US" altLang="zh-CN" sz="2600" dirty="0">
+                <a:latin typeface="Consolas"/>
+                <a:cs typeface="Consolas"/>
+              </a:rPr>
+              <a:t>      if (n % 2)  // (n%2)!=0</a:t>
+            </a:r>
+          </a:p>
+          <a:p>
+            <a:r>
+              <a:rPr lang="en-US" altLang="zh-CN" sz="2600" dirty="0">
+                <a:latin typeface="Consolas"/>
+                <a:cs typeface="Consolas"/>
+              </a:rPr>
+              <a:t>         return false; </a:t>
+            </a:r>
+          </a:p>
+          <a:p>
+            <a:r>
+              <a:rPr lang="en-US" altLang="zh-CN" sz="2600" dirty="0">
+                <a:latin typeface="Consolas"/>
+                <a:cs typeface="Consolas"/>
+              </a:rPr>
+              <a:t>      n = n &gt;&gt; 1;</a:t>
+            </a:r>
+          </a:p>
+          <a:p>
+            <a:r>
+              <a:rPr lang="en-US" altLang="zh-CN" sz="2600" dirty="0">
+                <a:latin typeface="Consolas"/>
+                <a:cs typeface="Consolas"/>
+              </a:rPr>
+              <a:t>   }</a:t>
+            </a:r>
+          </a:p>
+          <a:p>
+            <a:r>
+              <a:rPr lang="en-US" altLang="zh-CN" sz="2600" dirty="0">
+                <a:latin typeface="Consolas"/>
+                <a:cs typeface="Consolas"/>
+              </a:rPr>
+              <a:t>   return true;</a:t>
+            </a:r>
+          </a:p>
+          <a:p>
+            <a:r>
+              <a:rPr lang="en-US" altLang="zh-CN" sz="2600" dirty="0">
                 <a:latin typeface="Consolas"/>
                 <a:cs typeface="Consolas"/>
               </a:rPr>
               <a:t>}</a:t>
             </a:r>
-            <a:endParaRPr lang="zh-CN" altLang="en-US" sz="2800" dirty="0">
+            <a:endParaRPr lang="zh-CN" altLang="en-US" sz="2600" dirty="0">
               <a:latin typeface="Consolas"/>
               <a:cs typeface="Consolas"/>
             </a:endParaRPr>
@@ -23406,7 +23921,7 @@
     </p:spTree>
     <p:extLst>
       <p:ext uri="{BB962C8B-B14F-4D97-AF65-F5344CB8AC3E}">
-        <p14:creationId xmlns:p14="http://schemas.microsoft.com/office/powerpoint/2010/main" val="4205408796"/>
+        <p14:creationId xmlns:p14="http://schemas.microsoft.com/office/powerpoint/2010/main" val="3789686449"/>
       </p:ext>
     </p:extLst>
   </p:cSld>
@@ -23530,7 +24045,7 @@
         <p:spPr>
           <a:xfrm>
             <a:off x="544017" y="3282000"/>
-            <a:ext cx="7344094" cy="1877437"/>
+            <a:ext cx="8599983" cy="2308324"/>
           </a:xfrm>
           <a:prstGeom prst="rect">
             <a:avLst/>
@@ -23597,7 +24112,7 @@
                 <a:latin typeface="Consolas"/>
                 <a:cs typeface="Consolas"/>
               </a:rPr>
-              <a:t>  return n != 0 &amp;&amp; </a:t>
+              <a:t>  return </a:t>
             </a:r>
             <a:r>
               <a:rPr lang="mr-IN" altLang="zh-CN" sz="2800" dirty="0">
@@ -23611,7 +24126,16 @@
                 <a:latin typeface="Consolas"/>
                 <a:cs typeface="Consolas"/>
               </a:rPr>
-              <a:t>) == 0;</a:t>
+              <a:t>) == 0; </a:t>
+            </a:r>
+          </a:p>
+          <a:p>
+            <a:r>
+              <a:rPr lang="en-US" altLang="zh-CN" sz="2800" dirty="0">
+                <a:latin typeface="Consolas"/>
+                <a:cs typeface="Consolas"/>
+              </a:rPr>
+              <a:t>  // n&amp;(n-1) clears rightmost bit-of-1 in n</a:t>
             </a:r>
           </a:p>
           <a:p>
@@ -23638,7 +24162,7 @@
     </p:spTree>
     <p:extLst>
       <p:ext uri="{BB962C8B-B14F-4D97-AF65-F5344CB8AC3E}">
-        <p14:creationId xmlns:p14="http://schemas.microsoft.com/office/powerpoint/2010/main" val="1735239257"/>
+        <p14:creationId xmlns:p14="http://schemas.microsoft.com/office/powerpoint/2010/main" val="4205408796"/>
       </p:ext>
     </p:extLst>
   </p:cSld>
@@ -23698,12 +24222,7 @@
             <p:ph idx="1"/>
           </p:nvPr>
         </p:nvSpPr>
-        <p:spPr>
-          <a:xfrm>
-            <a:off x="457200" y="1600200"/>
-            <a:ext cx="8686800" cy="4525963"/>
-          </a:xfrm>
-        </p:spPr>
+        <p:spPr/>
         <p:txBody>
           <a:bodyPr/>
           <a:lstStyle/>
@@ -23713,16 +24232,7 @@
             </a:pPr>
             <a:r>
               <a:rPr kumimoji="1" lang="en-US" altLang="zh-CN" dirty="0"/>
-              <a:t>Count the number of ones in the binary representation of the given number ?</a:t>
-            </a:r>
-          </a:p>
-          <a:p>
-            <a:pPr marL="0" indent="0">
-              <a:buNone/>
-            </a:pPr>
-            <a:r>
-              <a:rPr kumimoji="1" lang="en-US" altLang="zh-CN" dirty="0"/>
-              <a:t>(n &gt; 0)</a:t>
+              <a:t>Given a number, write a function to decide if it is a power of two? </a:t>
             </a:r>
           </a:p>
           <a:p>
@@ -23776,7 +24286,7 @@
         <p:spPr>
           <a:xfrm>
             <a:off x="544017" y="3282000"/>
-            <a:ext cx="7671394" cy="1631216"/>
+            <a:ext cx="7344094" cy="1877437"/>
           </a:xfrm>
           <a:prstGeom prst="rect">
             <a:avLst/>
@@ -23793,6 +24303,34 @@
                 <a:latin typeface="Consolas"/>
                 <a:cs typeface="Consolas"/>
               </a:rPr>
+              <a:t>bool</a:t>
+            </a:r>
+            <a:r>
+              <a:rPr lang="en-US" altLang="zh-CN" sz="2800" dirty="0">
+                <a:latin typeface="Consolas"/>
+                <a:cs typeface="Consolas"/>
+              </a:rPr>
+              <a:t> </a:t>
+            </a:r>
+            <a:r>
+              <a:rPr lang="en-US" altLang="zh-CN" sz="2800" dirty="0" err="1">
+                <a:latin typeface="Consolas"/>
+                <a:cs typeface="Consolas"/>
+              </a:rPr>
+              <a:t>isPowerOfTwo</a:t>
+            </a:r>
+            <a:r>
+              <a:rPr lang="en-US" altLang="zh-CN" sz="2800" dirty="0">
+                <a:latin typeface="Consolas"/>
+                <a:cs typeface="Consolas"/>
+              </a:rPr>
+              <a:t>(unsigned </a:t>
+            </a:r>
+            <a:r>
+              <a:rPr lang="en-US" altLang="zh-CN" sz="2800" dirty="0" err="1">
+                <a:latin typeface="Consolas"/>
+                <a:cs typeface="Consolas"/>
+              </a:rPr>
               <a:t>int</a:t>
             </a:r>
             <a:r>
@@ -23800,21 +24338,7 @@
                 <a:latin typeface="Consolas"/>
                 <a:cs typeface="Consolas"/>
               </a:rPr>
-              <a:t> </a:t>
-            </a:r>
-            <a:r>
-              <a:rPr lang="en-US" altLang="zh-CN" sz="2800" dirty="0" err="1">
-                <a:latin typeface="Consolas"/>
-                <a:cs typeface="Consolas"/>
-              </a:rPr>
-              <a:t>count_one</a:t>
-            </a:r>
-            <a:r>
-              <a:rPr lang="en-US" altLang="zh-CN" sz="2800" dirty="0">
-                <a:latin typeface="Consolas"/>
-                <a:cs typeface="Consolas"/>
-              </a:rPr>
-              <a:t>(int n) {</a:t>
+              <a:t> n) {</a:t>
             </a:r>
           </a:p>
           <a:p>
@@ -23829,8 +24353,24 @@
                 <a:latin typeface="Consolas"/>
                 <a:cs typeface="Consolas"/>
               </a:rPr>
-              <a:t>   </a:t>
-            </a:r>
+              <a:t>  return n != 0 &amp;&amp; </a:t>
+            </a:r>
+            <a:r>
+              <a:rPr lang="mr-IN" altLang="zh-CN" sz="2800" dirty="0">
+                <a:latin typeface="Consolas"/>
+                <a:cs typeface="Consolas"/>
+              </a:rPr>
+              <a:t>(n &amp; (n-1)</a:t>
+            </a:r>
+            <a:r>
+              <a:rPr lang="en-US" altLang="zh-CN" sz="2800" dirty="0">
+                <a:latin typeface="Consolas"/>
+                <a:cs typeface="Consolas"/>
+              </a:rPr>
+              <a:t>) == 0;</a:t>
+            </a:r>
+          </a:p>
+          <a:p>
             <a:endParaRPr lang="en-US" altLang="zh-CN" sz="1600" dirty="0">
               <a:latin typeface="Consolas"/>
               <a:cs typeface="Consolas"/>
@@ -23854,7 +24394,7 @@
     </p:spTree>
     <p:extLst>
       <p:ext uri="{BB962C8B-B14F-4D97-AF65-F5344CB8AC3E}">
-        <p14:creationId xmlns:p14="http://schemas.microsoft.com/office/powerpoint/2010/main" val="1735145085"/>
+        <p14:creationId xmlns:p14="http://schemas.microsoft.com/office/powerpoint/2010/main" val="1735239257"/>
       </p:ext>
     </p:extLst>
   </p:cSld>
@@ -23991,8 +24531,8 @@
         </p:nvSpPr>
         <p:spPr>
           <a:xfrm>
-            <a:off x="544017" y="3180858"/>
-            <a:ext cx="7671394" cy="3539431"/>
+            <a:off x="544017" y="3282000"/>
+            <a:ext cx="7671394" cy="1631216"/>
           </a:xfrm>
           <a:prstGeom prst="rect">
             <a:avLst/>
@@ -24034,85 +24574,18 @@
             </a:r>
           </a:p>
           <a:p>
+            <a:endParaRPr lang="en-US" altLang="zh-CN" sz="1600" dirty="0">
+              <a:latin typeface="Consolas"/>
+              <a:cs typeface="Consolas"/>
+            </a:endParaRPr>
+          </a:p>
+          <a:p>
             <a:r>
               <a:rPr lang="en-US" altLang="zh-CN" sz="2800" dirty="0">
                 <a:latin typeface="Consolas"/>
                 <a:cs typeface="Consolas"/>
               </a:rPr>
               <a:t>   </a:t>
-            </a:r>
-            <a:r>
-              <a:rPr lang="en-US" altLang="zh-CN" sz="2800" dirty="0" err="1">
-                <a:latin typeface="Consolas"/>
-                <a:cs typeface="Consolas"/>
-              </a:rPr>
-              <a:t>int</a:t>
-            </a:r>
-            <a:r>
-              <a:rPr lang="en-US" altLang="zh-CN" sz="2800" dirty="0">
-                <a:latin typeface="Consolas"/>
-                <a:cs typeface="Consolas"/>
-              </a:rPr>
-              <a:t> count = 0;</a:t>
-            </a:r>
-          </a:p>
-          <a:p>
-            <a:r>
-              <a:rPr lang="en-US" altLang="zh-CN" sz="2800" dirty="0">
-                <a:latin typeface="Consolas"/>
-                <a:cs typeface="Consolas"/>
-              </a:rPr>
-              <a:t>   while (n != 0 ) {</a:t>
-            </a:r>
-          </a:p>
-          <a:p>
-            <a:r>
-              <a:rPr lang="en-US" altLang="zh-CN" sz="2800" dirty="0">
-                <a:latin typeface="Consolas"/>
-                <a:cs typeface="Consolas"/>
-              </a:rPr>
-              <a:t>      count += (n % 2);</a:t>
-            </a:r>
-          </a:p>
-          <a:p>
-            <a:r>
-              <a:rPr lang="en-US" altLang="zh-CN" sz="2800" dirty="0">
-                <a:latin typeface="Consolas"/>
-                <a:cs typeface="Consolas"/>
-              </a:rPr>
-              <a:t>      n = (unsigned </a:t>
-            </a:r>
-            <a:r>
-              <a:rPr lang="en-US" altLang="zh-CN" sz="2800" dirty="0" err="1">
-                <a:latin typeface="Consolas"/>
-                <a:cs typeface="Consolas"/>
-              </a:rPr>
-              <a:t>int</a:t>
-            </a:r>
-            <a:r>
-              <a:rPr lang="en-US" altLang="zh-CN" sz="2800" dirty="0">
-                <a:latin typeface="Consolas"/>
-                <a:cs typeface="Consolas"/>
-              </a:rPr>
-              <a:t>)n&gt;&gt;1;</a:t>
-            </a:r>
-          </a:p>
-          <a:p>
-            <a:r>
-              <a:rPr lang="en-US" altLang="zh-CN" sz="2800" dirty="0">
-                <a:latin typeface="Consolas"/>
-                <a:cs typeface="Consolas"/>
-              </a:rPr>
-              <a:t>   }</a:t>
-            </a:r>
-          </a:p>
-          <a:p>
-            <a:r>
-              <a:rPr lang="en-US" altLang="zh-CN" sz="2800" dirty="0">
-                <a:latin typeface="Consolas"/>
-                <a:cs typeface="Consolas"/>
-              </a:rPr>
-              <a:t>   return count;</a:t>
             </a:r>
             <a:endParaRPr lang="en-US" altLang="zh-CN" sz="1600" dirty="0">
               <a:latin typeface="Consolas"/>
@@ -24137,7 +24610,7 @@
     </p:spTree>
     <p:extLst>
       <p:ext uri="{BB962C8B-B14F-4D97-AF65-F5344CB8AC3E}">
-        <p14:creationId xmlns:p14="http://schemas.microsoft.com/office/powerpoint/2010/main" val="1430052465"/>
+        <p14:creationId xmlns:p14="http://schemas.microsoft.com/office/powerpoint/2010/main" val="1735145085"/>
       </p:ext>
     </p:extLst>
   </p:cSld>
@@ -24197,7 +24670,12 @@
             <p:ph idx="1"/>
           </p:nvPr>
         </p:nvSpPr>
-        <p:spPr/>
+        <p:spPr>
+          <a:xfrm>
+            <a:off x="457200" y="1600200"/>
+            <a:ext cx="8686800" cy="4525963"/>
+          </a:xfrm>
+        </p:spPr>
         <p:txBody>
           <a:bodyPr/>
           <a:lstStyle/>
@@ -24208,6 +24686,15 @@
             <a:r>
               <a:rPr kumimoji="1" lang="en-US" altLang="zh-CN" dirty="0"/>
               <a:t>Count the number of ones in the binary representation of the given number ?</a:t>
+            </a:r>
+          </a:p>
+          <a:p>
+            <a:pPr marL="0" indent="0">
+              <a:buNone/>
+            </a:pPr>
+            <a:r>
+              <a:rPr kumimoji="1" lang="en-US" altLang="zh-CN" dirty="0"/>
+              <a:t>(n &gt; 0)</a:t>
             </a:r>
           </a:p>
           <a:p>
@@ -24260,6 +24747,275 @@
         </p:nvSpPr>
         <p:spPr>
           <a:xfrm>
+            <a:off x="544017" y="3180858"/>
+            <a:ext cx="7671394" cy="3539431"/>
+          </a:xfrm>
+          <a:prstGeom prst="rect">
+            <a:avLst/>
+          </a:prstGeom>
+        </p:spPr>
+        <p:txBody>
+          <a:bodyPr wrap="square">
+            <a:spAutoFit/>
+          </a:bodyPr>
+          <a:lstStyle/>
+          <a:p>
+            <a:r>
+              <a:rPr lang="en-US" altLang="zh-CN" sz="2800" dirty="0" err="1">
+                <a:latin typeface="Consolas"/>
+                <a:cs typeface="Consolas"/>
+              </a:rPr>
+              <a:t>int</a:t>
+            </a:r>
+            <a:r>
+              <a:rPr lang="en-US" altLang="zh-CN" sz="2800" dirty="0">
+                <a:latin typeface="Consolas"/>
+                <a:cs typeface="Consolas"/>
+              </a:rPr>
+              <a:t> </a:t>
+            </a:r>
+            <a:r>
+              <a:rPr lang="en-US" altLang="zh-CN" sz="2800" dirty="0" err="1">
+                <a:latin typeface="Consolas"/>
+                <a:cs typeface="Consolas"/>
+              </a:rPr>
+              <a:t>count_one</a:t>
+            </a:r>
+            <a:r>
+              <a:rPr lang="en-US" altLang="zh-CN" sz="2800" dirty="0">
+                <a:latin typeface="Consolas"/>
+                <a:cs typeface="Consolas"/>
+              </a:rPr>
+              <a:t>(int n) {</a:t>
+            </a:r>
+          </a:p>
+          <a:p>
+            <a:r>
+              <a:rPr lang="en-US" altLang="zh-CN" sz="2800" dirty="0">
+                <a:latin typeface="Consolas"/>
+                <a:cs typeface="Consolas"/>
+              </a:rPr>
+              <a:t>   </a:t>
+            </a:r>
+            <a:r>
+              <a:rPr lang="en-US" altLang="zh-CN" sz="2800" dirty="0" err="1">
+                <a:latin typeface="Consolas"/>
+                <a:cs typeface="Consolas"/>
+              </a:rPr>
+              <a:t>int</a:t>
+            </a:r>
+            <a:r>
+              <a:rPr lang="en-US" altLang="zh-CN" sz="2800" dirty="0">
+                <a:latin typeface="Consolas"/>
+                <a:cs typeface="Consolas"/>
+              </a:rPr>
+              <a:t> count = 0;</a:t>
+            </a:r>
+          </a:p>
+          <a:p>
+            <a:r>
+              <a:rPr lang="en-US" altLang="zh-CN" sz="2800" dirty="0">
+                <a:latin typeface="Consolas"/>
+                <a:cs typeface="Consolas"/>
+              </a:rPr>
+              <a:t>   while (n != 0 ) {</a:t>
+            </a:r>
+          </a:p>
+          <a:p>
+            <a:r>
+              <a:rPr lang="en-US" altLang="zh-CN" sz="2800" dirty="0">
+                <a:latin typeface="Consolas"/>
+                <a:cs typeface="Consolas"/>
+              </a:rPr>
+              <a:t>      count += (n % 2);</a:t>
+            </a:r>
+          </a:p>
+          <a:p>
+            <a:r>
+              <a:rPr lang="en-US" altLang="zh-CN" sz="2800" dirty="0">
+                <a:latin typeface="Consolas"/>
+                <a:cs typeface="Consolas"/>
+              </a:rPr>
+              <a:t>      n = (unsigned </a:t>
+            </a:r>
+            <a:r>
+              <a:rPr lang="en-US" altLang="zh-CN" sz="2800" dirty="0" err="1">
+                <a:latin typeface="Consolas"/>
+                <a:cs typeface="Consolas"/>
+              </a:rPr>
+              <a:t>int</a:t>
+            </a:r>
+            <a:r>
+              <a:rPr lang="en-US" altLang="zh-CN" sz="2800" dirty="0">
+                <a:latin typeface="Consolas"/>
+                <a:cs typeface="Consolas"/>
+              </a:rPr>
+              <a:t>)n&gt;&gt;1;</a:t>
+            </a:r>
+          </a:p>
+          <a:p>
+            <a:r>
+              <a:rPr lang="en-US" altLang="zh-CN" sz="2800" dirty="0">
+                <a:latin typeface="Consolas"/>
+                <a:cs typeface="Consolas"/>
+              </a:rPr>
+              <a:t>   }</a:t>
+            </a:r>
+          </a:p>
+          <a:p>
+            <a:r>
+              <a:rPr lang="en-US" altLang="zh-CN" sz="2800" dirty="0">
+                <a:latin typeface="Consolas"/>
+                <a:cs typeface="Consolas"/>
+              </a:rPr>
+              <a:t>   return count;</a:t>
+            </a:r>
+            <a:endParaRPr lang="en-US" altLang="zh-CN" sz="1600" dirty="0">
+              <a:latin typeface="Consolas"/>
+              <a:cs typeface="Consolas"/>
+            </a:endParaRPr>
+          </a:p>
+          <a:p>
+            <a:r>
+              <a:rPr lang="en-US" altLang="zh-CN" sz="2800" dirty="0">
+                <a:latin typeface="Consolas"/>
+                <a:cs typeface="Consolas"/>
+              </a:rPr>
+              <a:t>}</a:t>
+            </a:r>
+            <a:endParaRPr lang="zh-CN" altLang="en-US" sz="2800" dirty="0">
+              <a:latin typeface="Consolas"/>
+              <a:cs typeface="Consolas"/>
+            </a:endParaRPr>
+          </a:p>
+        </p:txBody>
+      </p:sp>
+    </p:spTree>
+    <p:extLst>
+      <p:ext uri="{BB962C8B-B14F-4D97-AF65-F5344CB8AC3E}">
+        <p14:creationId xmlns:p14="http://schemas.microsoft.com/office/powerpoint/2010/main" val="1430052465"/>
+      </p:ext>
+    </p:extLst>
+  </p:cSld>
+  <p:clrMapOvr>
+    <a:masterClrMapping/>
+  </p:clrMapOvr>
+</p:sld>
+</file>
+
+<file path=ppt/slides/slide48.xml><?xml version="1.0" encoding="utf-8"?>
+<p:sld xmlns:a="http://schemas.openxmlformats.org/drawingml/2006/main" xmlns:r="http://schemas.openxmlformats.org/officeDocument/2006/relationships" xmlns:p="http://schemas.openxmlformats.org/presentationml/2006/main" show="0">
+  <p:cSld>
+    <p:spTree>
+      <p:nvGrpSpPr>
+        <p:cNvPr id="1" name=""/>
+        <p:cNvGrpSpPr/>
+        <p:nvPr/>
+      </p:nvGrpSpPr>
+      <p:grpSpPr>
+        <a:xfrm>
+          <a:off x="0" y="0"/>
+          <a:ext cx="0" cy="0"/>
+          <a:chOff x="0" y="0"/>
+          <a:chExt cx="0" cy="0"/>
+        </a:xfrm>
+      </p:grpSpPr>
+      <p:sp>
+        <p:nvSpPr>
+          <p:cNvPr id="2" name="标题 1"/>
+          <p:cNvSpPr>
+            <a:spLocks noGrp="1"/>
+          </p:cNvSpPr>
+          <p:nvPr>
+            <p:ph type="title"/>
+          </p:nvPr>
+        </p:nvSpPr>
+        <p:spPr/>
+        <p:txBody>
+          <a:bodyPr/>
+          <a:lstStyle/>
+          <a:p>
+            <a:r>
+              <a:rPr kumimoji="1" lang="en-US" altLang="zh-CN" dirty="0"/>
+              <a:t>Exercises</a:t>
+            </a:r>
+            <a:endParaRPr kumimoji="1" lang="zh-CN" altLang="en-US" dirty="0"/>
+          </a:p>
+        </p:txBody>
+      </p:sp>
+      <p:sp>
+        <p:nvSpPr>
+          <p:cNvPr id="3" name="内容占位符 2"/>
+          <p:cNvSpPr>
+            <a:spLocks noGrp="1"/>
+          </p:cNvSpPr>
+          <p:nvPr>
+            <p:ph idx="1"/>
+          </p:nvPr>
+        </p:nvSpPr>
+        <p:spPr/>
+        <p:txBody>
+          <a:bodyPr/>
+          <a:lstStyle/>
+          <a:p>
+            <a:pPr marL="0" indent="0">
+              <a:buNone/>
+            </a:pPr>
+            <a:r>
+              <a:rPr kumimoji="1" lang="en-US" altLang="zh-CN" dirty="0"/>
+              <a:t>Count the number of ones in the binary representation of the given number ?</a:t>
+            </a:r>
+          </a:p>
+          <a:p>
+            <a:pPr marL="0" indent="0">
+              <a:buNone/>
+            </a:pPr>
+            <a:endParaRPr kumimoji="1" lang="en-US" altLang="zh-CN" dirty="0"/>
+          </a:p>
+          <a:p>
+            <a:pPr marL="0" indent="0">
+              <a:buNone/>
+            </a:pPr>
+            <a:endParaRPr kumimoji="1" lang="zh-CN" altLang="en-US" dirty="0"/>
+          </a:p>
+        </p:txBody>
+      </p:sp>
+      <p:sp>
+        <p:nvSpPr>
+          <p:cNvPr id="4" name="矩形 3"/>
+          <p:cNvSpPr/>
+          <p:nvPr/>
+        </p:nvSpPr>
+        <p:spPr>
+          <a:xfrm>
+            <a:off x="802506" y="3180858"/>
+            <a:ext cx="5479868" cy="523220"/>
+          </a:xfrm>
+          <a:prstGeom prst="rect">
+            <a:avLst/>
+          </a:prstGeom>
+        </p:spPr>
+        <p:txBody>
+          <a:bodyPr wrap="square">
+            <a:spAutoFit/>
+          </a:bodyPr>
+          <a:lstStyle/>
+          <a:p>
+            <a:endParaRPr lang="zh-CN" altLang="en-US" sz="2800" dirty="0">
+              <a:latin typeface="Consolas"/>
+              <a:cs typeface="Consolas"/>
+            </a:endParaRPr>
+          </a:p>
+        </p:txBody>
+      </p:sp>
+      <p:sp>
+        <p:nvSpPr>
+          <p:cNvPr id="5" name="矩形 4"/>
+          <p:cNvSpPr/>
+          <p:nvPr/>
+        </p:nvSpPr>
+        <p:spPr>
+          <a:xfrm>
             <a:off x="544017" y="3282000"/>
             <a:ext cx="7671394" cy="1631216"/>
           </a:xfrm>
@@ -24394,7 +25150,7 @@
 </p:sld>
 </file>
 
-<file path=ppt/slides/slide48.xml><?xml version="1.0" encoding="utf-8"?>
+<file path=ppt/slides/slide49.xml><?xml version="1.0" encoding="utf-8"?>
 <p:sld xmlns:a="http://schemas.openxmlformats.org/drawingml/2006/main" xmlns:r="http://schemas.openxmlformats.org/officeDocument/2006/relationships" xmlns:p="http://schemas.openxmlformats.org/presentationml/2006/main" show="0">
   <p:cSld>
     <p:spTree>
@@ -25321,14 +26077,14 @@
             </a:ln>
             <a:extLst>
               <a:ext uri="{909E8E84-426E-40dd-AFC4-6F175D3DCCD1}">
-                <a14:hiddenFill xmlns:a14="http://schemas.microsoft.com/office/drawing/2010/main" xmlns="">
+                <a14:hiddenFill xmlns="" xmlns:a14="http://schemas.microsoft.com/office/drawing/2010/main">
                   <a:solidFill>
                     <a:srgbClr val="FFFFFF"/>
                   </a:solidFill>
                 </a14:hiddenFill>
               </a:ext>
               <a:ext uri="{91240B29-F687-4f45-9708-019B960494DF}">
-                <a14:hiddenLine xmlns:a14="http://schemas.microsoft.com/office/drawing/2010/main" xmlns="" w="9525">
+                <a14:hiddenLine xmlns="" xmlns:a14="http://schemas.microsoft.com/office/drawing/2010/main" w="9525">
                   <a:solidFill>
                     <a:srgbClr val="000000"/>
                   </a:solidFill>
@@ -25476,7 +26232,7 @@
             </a:ln>
             <a:extLst>
               <a:ext uri="{909E8E84-426E-40dd-AFC4-6F175D3DCCD1}">
-                <a14:hiddenFill xmlns:a14="http://schemas.microsoft.com/office/drawing/2010/main" xmlns="">
+                <a14:hiddenFill xmlns="" xmlns:a14="http://schemas.microsoft.com/office/drawing/2010/main">
                   <a:noFill/>
                 </a14:hiddenFill>
               </a:ext>
@@ -25534,14 +26290,14 @@
             </a:ln>
             <a:extLst>
               <a:ext uri="{909E8E84-426E-40dd-AFC4-6F175D3DCCD1}">
-                <a14:hiddenFill xmlns:a14="http://schemas.microsoft.com/office/drawing/2010/main" xmlns="">
+                <a14:hiddenFill xmlns="" xmlns:a14="http://schemas.microsoft.com/office/drawing/2010/main">
                   <a:solidFill>
                     <a:srgbClr val="FFFFFF"/>
                   </a:solidFill>
                 </a14:hiddenFill>
               </a:ext>
               <a:ext uri="{91240B29-F687-4f45-9708-019B960494DF}">
-                <a14:hiddenLine xmlns:a14="http://schemas.microsoft.com/office/drawing/2010/main" xmlns="" w="9525">
+                <a14:hiddenLine xmlns="" xmlns:a14="http://schemas.microsoft.com/office/drawing/2010/main" w="9525">
                   <a:solidFill>
                     <a:srgbClr val="000000"/>
                   </a:solidFill>
@@ -25697,7 +26453,7 @@
             </a:ln>
             <a:extLst>
               <a:ext uri="{909E8E84-426E-40dd-AFC4-6F175D3DCCD1}">
-                <a14:hiddenFill xmlns:a14="http://schemas.microsoft.com/office/drawing/2010/main" xmlns="">
+                <a14:hiddenFill xmlns="" xmlns:a14="http://schemas.microsoft.com/office/drawing/2010/main">
                   <a:noFill/>
                 </a14:hiddenFill>
               </a:ext>
@@ -26148,14 +26904,14 @@
               </a:ln>
               <a:extLst>
                 <a:ext uri="{909E8E84-426E-40dd-AFC4-6F175D3DCCD1}">
-                  <a14:hiddenFill xmlns:a14="http://schemas.microsoft.com/office/drawing/2010/main" xmlns="">
+                  <a14:hiddenFill xmlns="" xmlns:a14="http://schemas.microsoft.com/office/drawing/2010/main">
                     <a:solidFill>
                       <a:srgbClr val="FFFFFF"/>
                     </a:solidFill>
                   </a14:hiddenFill>
                 </a:ext>
                 <a:ext uri="{91240B29-F687-4f45-9708-019B960494DF}">
-                  <a14:hiddenLine xmlns:a14="http://schemas.microsoft.com/office/drawing/2010/main" xmlns="" w="9525">
+                  <a14:hiddenLine xmlns="" xmlns:a14="http://schemas.microsoft.com/office/drawing/2010/main" w="9525">
                     <a:solidFill>
                       <a:srgbClr val="000000"/>
                     </a:solidFill>
@@ -26326,7 +27082,7 @@
               </a:ln>
               <a:extLst>
                 <a:ext uri="{909E8E84-426E-40dd-AFC4-6F175D3DCCD1}">
-                  <a14:hiddenFill xmlns:a14="http://schemas.microsoft.com/office/drawing/2010/main" xmlns="">
+                  <a14:hiddenFill xmlns="" xmlns:a14="http://schemas.microsoft.com/office/drawing/2010/main">
                     <a:noFill/>
                   </a14:hiddenFill>
                 </a:ext>
@@ -35350,21 +36106,12 @@
 </file>
 
 <file path=customXml/item1.xml><?xml version="1.0" encoding="utf-8"?>
-<?mso-contentType ?>
-<FormTemplates xmlns="http://schemas.microsoft.com/sharepoint/v3/contenttype/forms">
-  <Display>DocumentLibraryForm</Display>
-  <Edit>DocumentLibraryForm</Edit>
-  <New>DocumentLibraryForm</New>
-</FormTemplates>
-</file>
-
-<file path=customXml/item2.xml><?xml version="1.0" encoding="utf-8"?>
 <p:properties xmlns:p="http://schemas.microsoft.com/office/2006/metadata/properties" xmlns:xsi="http://www.w3.org/2001/XMLSchema-instance" xmlns:pc="http://schemas.microsoft.com/office/infopath/2007/PartnerControls">
   <documentManagement/>
 </p:properties>
 </file>
 
-<file path=customXml/item3.xml><?xml version="1.0" encoding="utf-8"?>
+<file path=customXml/item2.xml><?xml version="1.0" encoding="utf-8"?>
 <ct:contentTypeSchema xmlns:ct="http://schemas.microsoft.com/office/2006/metadata/contentType" xmlns:ma="http://schemas.microsoft.com/office/2006/metadata/properties/metaAttributes" ct:_="" ma:_="" ma:contentTypeName="Document" ma:contentTypeID="0x010100F230F55FC4E86843A38ABC983CBD33D2" ma:contentTypeVersion="2" ma:contentTypeDescription="Create a new document." ma:contentTypeScope="" ma:versionID="ea51d48ed41b66d32eb63de817eecbcd">
   <xsd:schema xmlns:xsd="http://www.w3.org/2001/XMLSchema" xmlns:xs="http://www.w3.org/2001/XMLSchema" xmlns:p="http://schemas.microsoft.com/office/2006/metadata/properties" xmlns:ns3="74d6482f-e53c-4fa7-ac87-951f9f66bd4c" targetNamespace="http://schemas.microsoft.com/office/2006/metadata/properties" ma:root="true" ma:fieldsID="128b5480a780b9585a060f8329b1fff7" ns3:_="">
     <xsd:import namespace="74d6482f-e53c-4fa7-ac87-951f9f66bd4c"/>
@@ -35496,15 +36243,16 @@
 </ct:contentTypeSchema>
 </file>
 
-<file path=customXml/itemProps1.xml><?xml version="1.0" encoding="utf-8"?>
-<ds:datastoreItem xmlns:ds="http://schemas.openxmlformats.org/officeDocument/2006/customXml" ds:itemID="{8D9EAE06-F499-4824-BE4B-0A87E98634FE}">
-  <ds:schemaRefs>
-    <ds:schemaRef ds:uri="http://schemas.microsoft.com/sharepoint/v3/contenttype/forms"/>
-  </ds:schemaRefs>
-</ds:datastoreItem>
+<file path=customXml/item3.xml><?xml version="1.0" encoding="utf-8"?>
+<?mso-contentType ?>
+<FormTemplates xmlns="http://schemas.microsoft.com/sharepoint/v3/contenttype/forms">
+  <Display>DocumentLibraryForm</Display>
+  <Edit>DocumentLibraryForm</Edit>
+  <New>DocumentLibraryForm</New>
+</FormTemplates>
 </file>
 
-<file path=customXml/itemProps2.xml><?xml version="1.0" encoding="utf-8"?>
+<file path=customXml/itemProps1.xml><?xml version="1.0" encoding="utf-8"?>
 <ds:datastoreItem xmlns:ds="http://schemas.openxmlformats.org/officeDocument/2006/customXml" ds:itemID="{F00399CF-0210-4C41-B302-99CA3E05A3BD}">
   <ds:schemaRefs>
     <ds:schemaRef ds:uri="http://schemas.microsoft.com/office/2006/documentManagement/types"/>
@@ -35520,7 +36268,7 @@
 </ds:datastoreItem>
 </file>
 
-<file path=customXml/itemProps3.xml><?xml version="1.0" encoding="utf-8"?>
+<file path=customXml/itemProps2.xml><?xml version="1.0" encoding="utf-8"?>
 <ds:datastoreItem xmlns:ds="http://schemas.openxmlformats.org/officeDocument/2006/customXml" ds:itemID="{4912D04E-EC5D-4392-B6A4-B623005FC914}">
   <ds:schemaRefs>
     <ds:schemaRef ds:uri="http://schemas.microsoft.com/office/2006/metadata/contentType"/>
@@ -35536,4 +36284,12 @@
     <ds:schemaRef ds:uri="http://schemas.microsoft.com/internal/obd"/>
   </ds:schemaRefs>
 </ds:datastoreItem>
+</file>
+
+<file path=customXml/itemProps3.xml><?xml version="1.0" encoding="utf-8"?>
+<ds:datastoreItem xmlns:ds="http://schemas.openxmlformats.org/officeDocument/2006/customXml" ds:itemID="{8D9EAE06-F499-4824-BE4B-0A87E98634FE}">
+  <ds:schemaRefs>
+    <ds:schemaRef ds:uri="http://schemas.microsoft.com/sharepoint/v3/contenttype/forms"/>
+  </ds:schemaRefs>
+</ds:datastoreItem>
 </file>